--- a/output_pptx/God_Of_This_City.pptx
+++ b/output_pptx/God_Of_This_City.pptx
@@ -3232,6 +3232,76 @@
           </a:p>
         </p:txBody>
       </p:sp>
+      <p:sp>
+        <p:nvSpPr>
+          <p:cNvPr id="4" name="TextBox 3"/>
+          <p:cNvSpPr txBox="1"/>
+          <p:nvPr/>
+        </p:nvSpPr>
+        <p:spPr>
+          <a:xfrm>
+            <a:off x="640080" y="4128516"/>
+            <a:ext cx="10911535" cy="310896"/>
+          </a:xfrm>
+          <a:prstGeom prst="rect">
+            <a:avLst/>
+          </a:prstGeom>
+          <a:noFill/>
+        </p:spPr>
+        <p:txBody>
+          <a:bodyPr wrap="square">
+            <a:spAutoFit/>
+          </a:bodyPr>
+          <a:lstStyle/>
+          <a:p>
+            <a:pPr algn="ctr"/>
+            <a:r>
+              <a:rPr sz="2000" b="0" i="0">
+                <a:solidFill>
+                  <a:srgbClr val="828282"/>
+                </a:solidFill>
+                <a:latin typeface="Arial"/>
+              </a:rPr>
+              <a:t>この都市の神</a:t>
+            </a:r>
+          </a:p>
+        </p:txBody>
+      </p:sp>
+      <p:sp>
+        <p:nvSpPr>
+          <p:cNvPr id="5" name="TextBox 4"/>
+          <p:cNvSpPr txBox="1"/>
+          <p:nvPr/>
+        </p:nvSpPr>
+        <p:spPr>
+          <a:xfrm>
+            <a:off x="640080" y="4494276"/>
+            <a:ext cx="10911535" cy="310896"/>
+          </a:xfrm>
+          <a:prstGeom prst="rect">
+            <a:avLst/>
+          </a:prstGeom>
+          <a:noFill/>
+        </p:spPr>
+        <p:txBody>
+          <a:bodyPr wrap="square">
+            <a:spAutoFit/>
+          </a:bodyPr>
+          <a:lstStyle/>
+          <a:p>
+            <a:pPr algn="ctr"/>
+            <a:r>
+              <a:rPr sz="2000" b="0" i="0">
+                <a:solidFill>
+                  <a:srgbClr val="828282"/>
+                </a:solidFill>
+                <a:latin typeface="Arial"/>
+              </a:rPr>
+              <a:t>あなたはこの都市の神です</a:t>
+            </a:r>
+          </a:p>
+        </p:txBody>
+      </p:sp>
     </p:spTree>
   </p:cSld>
   <p:clrMapOvr>
@@ -3328,6 +3398,76 @@
           </a:p>
         </p:txBody>
       </p:sp>
+      <p:sp>
+        <p:nvSpPr>
+          <p:cNvPr id="4" name="TextBox 3"/>
+          <p:cNvSpPr txBox="1"/>
+          <p:nvPr/>
+        </p:nvSpPr>
+        <p:spPr>
+          <a:xfrm>
+            <a:off x="640080" y="4128516"/>
+            <a:ext cx="10911535" cy="310896"/>
+          </a:xfrm>
+          <a:prstGeom prst="rect">
+            <a:avLst/>
+          </a:prstGeom>
+          <a:noFill/>
+        </p:spPr>
+        <p:txBody>
+          <a:bodyPr wrap="square">
+            <a:spAutoFit/>
+          </a:bodyPr>
+          <a:lstStyle/>
+          <a:p>
+            <a:pPr algn="ctr"/>
+            <a:r>
+              <a:rPr sz="2000" b="0" i="0">
+                <a:solidFill>
+                  <a:srgbClr val="828282"/>
+                </a:solidFill>
+                <a:latin typeface="Arial"/>
+              </a:rPr>
+              <a:t>あなたは不安な者たちの平和です</a:t>
+            </a:r>
+          </a:p>
+        </p:txBody>
+      </p:sp>
+      <p:sp>
+        <p:nvSpPr>
+          <p:cNvPr id="5" name="TextBox 4"/>
+          <p:cNvSpPr txBox="1"/>
+          <p:nvPr/>
+        </p:nvSpPr>
+        <p:spPr>
+          <a:xfrm>
+            <a:off x="640080" y="4494276"/>
+            <a:ext cx="10911535" cy="310896"/>
+          </a:xfrm>
+          <a:prstGeom prst="rect">
+            <a:avLst/>
+          </a:prstGeom>
+          <a:noFill/>
+        </p:spPr>
+        <p:txBody>
+          <a:bodyPr wrap="square">
+            <a:spAutoFit/>
+          </a:bodyPr>
+          <a:lstStyle/>
+          <a:p>
+            <a:pPr algn="ctr"/>
+            <a:r>
+              <a:rPr sz="2000" b="0" i="0">
+                <a:solidFill>
+                  <a:srgbClr val="828282"/>
+                </a:solidFill>
+                <a:latin typeface="Arial"/>
+              </a:rPr>
+              <a:t>あなたです</a:t>
+            </a:r>
+          </a:p>
+        </p:txBody>
+      </p:sp>
     </p:spTree>
   </p:cSld>
   <p:clrMapOvr>
@@ -3424,6 +3564,76 @@
           </a:p>
         </p:txBody>
       </p:sp>
+      <p:sp>
+        <p:nvSpPr>
+          <p:cNvPr id="4" name="TextBox 3"/>
+          <p:cNvSpPr txBox="1"/>
+          <p:nvPr/>
+        </p:nvSpPr>
+        <p:spPr>
+          <a:xfrm>
+            <a:off x="640080" y="4128516"/>
+            <a:ext cx="10911535" cy="310896"/>
+          </a:xfrm>
+          <a:prstGeom prst="rect">
+            <a:avLst/>
+          </a:prstGeom>
+          <a:noFill/>
+        </p:spPr>
+        <p:txBody>
+          <a:bodyPr wrap="square">
+            <a:spAutoFit/>
+          </a:bodyPr>
+          <a:lstStyle/>
+          <a:p>
+            <a:pPr algn="ctr"/>
+            <a:r>
+              <a:rPr sz="2000" b="0" i="0">
+                <a:solidFill>
+                  <a:srgbClr val="828282"/>
+                </a:solidFill>
+                <a:latin typeface="Arial"/>
+              </a:rPr>
+              <a:t>私たちの神のようなお方はいません</a:t>
+            </a:r>
+          </a:p>
+        </p:txBody>
+      </p:sp>
+      <p:sp>
+        <p:nvSpPr>
+          <p:cNvPr id="5" name="TextBox 4"/>
+          <p:cNvSpPr txBox="1"/>
+          <p:nvPr/>
+        </p:nvSpPr>
+        <p:spPr>
+          <a:xfrm>
+            <a:off x="640080" y="4494276"/>
+            <a:ext cx="10911535" cy="310896"/>
+          </a:xfrm>
+          <a:prstGeom prst="rect">
+            <a:avLst/>
+          </a:prstGeom>
+          <a:noFill/>
+        </p:spPr>
+        <p:txBody>
+          <a:bodyPr wrap="square">
+            <a:spAutoFit/>
+          </a:bodyPr>
+          <a:lstStyle/>
+          <a:p>
+            <a:pPr algn="ctr"/>
+            <a:r>
+              <a:rPr sz="2000" b="0" i="0">
+                <a:solidFill>
+                  <a:srgbClr val="828282"/>
+                </a:solidFill>
+                <a:latin typeface="Arial"/>
+              </a:rPr>
+              <a:t>私たちの神のようなお方はいません</a:t>
+            </a:r>
+          </a:p>
+        </p:txBody>
+      </p:sp>
     </p:spTree>
   </p:cSld>
   <p:clrMapOvr>
@@ -3520,6 +3730,76 @@
           </a:p>
         </p:txBody>
       </p:sp>
+      <p:sp>
+        <p:nvSpPr>
+          <p:cNvPr id="4" name="TextBox 3"/>
+          <p:cNvSpPr txBox="1"/>
+          <p:nvPr/>
+        </p:nvSpPr>
+        <p:spPr>
+          <a:xfrm>
+            <a:off x="640080" y="4128516"/>
+            <a:ext cx="10911535" cy="310896"/>
+          </a:xfrm>
+          <a:prstGeom prst="rect">
+            <a:avLst/>
+          </a:prstGeom>
+          <a:noFill/>
+        </p:spPr>
+        <p:txBody>
+          <a:bodyPr wrap="square">
+            <a:spAutoFit/>
+          </a:bodyPr>
+          <a:lstStyle/>
+          <a:p>
+            <a:pPr algn="ctr"/>
+            <a:r>
+              <a:rPr sz="2000" b="0" i="0">
+                <a:solidFill>
+                  <a:srgbClr val="828282"/>
+                </a:solidFill>
+                <a:latin typeface="Arial"/>
+              </a:rPr>
+              <a:t>さらに大いなる事柄がまだ来ようとしています</a:t>
+            </a:r>
+          </a:p>
+        </p:txBody>
+      </p:sp>
+      <p:sp>
+        <p:nvSpPr>
+          <p:cNvPr id="5" name="TextBox 4"/>
+          <p:cNvSpPr txBox="1"/>
+          <p:nvPr/>
+        </p:nvSpPr>
+        <p:spPr>
+          <a:xfrm>
+            <a:off x="640080" y="4494276"/>
+            <a:ext cx="10911535" cy="310896"/>
+          </a:xfrm>
+          <a:prstGeom prst="rect">
+            <a:avLst/>
+          </a:prstGeom>
+          <a:noFill/>
+        </p:spPr>
+        <p:txBody>
+          <a:bodyPr wrap="square">
+            <a:spAutoFit/>
+          </a:bodyPr>
+          <a:lstStyle/>
+          <a:p>
+            <a:pPr algn="ctr"/>
+            <a:r>
+              <a:rPr sz="2000" b="0" i="0">
+                <a:solidFill>
+                  <a:srgbClr val="828282"/>
+                </a:solidFill>
+                <a:latin typeface="Arial"/>
+              </a:rPr>
+              <a:t>そして大いなる事柄がまだこの都市で成し遂げられるでしょう</a:t>
+            </a:r>
+          </a:p>
+        </p:txBody>
+      </p:sp>
     </p:spTree>
   </p:cSld>
   <p:clrMapOvr>
@@ -3616,6 +3896,76 @@
           </a:p>
         </p:txBody>
       </p:sp>
+      <p:sp>
+        <p:nvSpPr>
+          <p:cNvPr id="4" name="TextBox 3"/>
+          <p:cNvSpPr txBox="1"/>
+          <p:nvPr/>
+        </p:nvSpPr>
+        <p:spPr>
+          <a:xfrm>
+            <a:off x="640080" y="4128516"/>
+            <a:ext cx="10911535" cy="310896"/>
+          </a:xfrm>
+          <a:prstGeom prst="rect">
+            <a:avLst/>
+          </a:prstGeom>
+          <a:noFill/>
+        </p:spPr>
+        <p:txBody>
+          <a:bodyPr wrap="square">
+            <a:spAutoFit/>
+          </a:bodyPr>
+          <a:lstStyle/>
+          <a:p>
+            <a:pPr algn="ctr"/>
+            <a:r>
+              <a:rPr sz="2000" b="0" i="0">
+                <a:solidFill>
+                  <a:srgbClr val="828282"/>
+                </a:solidFill>
+                <a:latin typeface="Arial"/>
+              </a:rPr>
+              <a:t>この都市で</a:t>
+            </a:r>
+          </a:p>
+        </p:txBody>
+      </p:sp>
+      <p:sp>
+        <p:nvSpPr>
+          <p:cNvPr id="5" name="TextBox 4"/>
+          <p:cNvSpPr txBox="1"/>
+          <p:nvPr/>
+        </p:nvSpPr>
+        <p:spPr>
+          <a:xfrm>
+            <a:off x="640080" y="4494276"/>
+            <a:ext cx="10911535" cy="310896"/>
+          </a:xfrm>
+          <a:prstGeom prst="rect">
+            <a:avLst/>
+          </a:prstGeom>
+          <a:noFill/>
+        </p:spPr>
+        <p:txBody>
+          <a:bodyPr wrap="square">
+            <a:spAutoFit/>
+          </a:bodyPr>
+          <a:lstStyle/>
+          <a:p>
+            <a:pPr algn="ctr"/>
+            <a:r>
+              <a:rPr sz="2000" b="0" i="0">
+                <a:solidFill>
+                  <a:srgbClr val="828282"/>
+                </a:solidFill>
+                <a:latin typeface="Arial"/>
+              </a:rPr>
+              <a:t>私たちは信じます！</a:t>
+            </a:r>
+          </a:p>
+        </p:txBody>
+      </p:sp>
     </p:spTree>
   </p:cSld>
   <p:clrMapOvr>
@@ -3712,6 +4062,76 @@
           </a:p>
         </p:txBody>
       </p:sp>
+      <p:sp>
+        <p:nvSpPr>
+          <p:cNvPr id="4" name="TextBox 3"/>
+          <p:cNvSpPr txBox="1"/>
+          <p:nvPr/>
+        </p:nvSpPr>
+        <p:spPr>
+          <a:xfrm>
+            <a:off x="640080" y="4128516"/>
+            <a:ext cx="10911535" cy="310896"/>
+          </a:xfrm>
+          <a:prstGeom prst="rect">
+            <a:avLst/>
+          </a:prstGeom>
+          <a:noFill/>
+        </p:spPr>
+        <p:txBody>
+          <a:bodyPr wrap="square">
+            <a:spAutoFit/>
+          </a:bodyPr>
+          <a:lstStyle/>
+          <a:p>
+            <a:pPr algn="ctr"/>
+            <a:r>
+              <a:rPr sz="2000" b="0" i="0">
+                <a:solidFill>
+                  <a:srgbClr val="828282"/>
+                </a:solidFill>
+                <a:latin typeface="Arial"/>
+              </a:rPr>
+              <a:t>私たちはあなたを信じます、神よ</a:t>
+            </a:r>
+          </a:p>
+        </p:txBody>
+      </p:sp>
+      <p:sp>
+        <p:nvSpPr>
+          <p:cNvPr id="5" name="TextBox 4"/>
+          <p:cNvSpPr txBox="1"/>
+          <p:nvPr/>
+        </p:nvSpPr>
+        <p:spPr>
+          <a:xfrm>
+            <a:off x="640080" y="4494276"/>
+            <a:ext cx="10911535" cy="310896"/>
+          </a:xfrm>
+          <a:prstGeom prst="rect">
+            <a:avLst/>
+          </a:prstGeom>
+          <a:noFill/>
+        </p:spPr>
+        <p:txBody>
+          <a:bodyPr wrap="square">
+            <a:spAutoFit/>
+          </a:bodyPr>
+          <a:lstStyle/>
+          <a:p>
+            <a:pPr algn="ctr"/>
+            <a:r>
+              <a:rPr sz="2000" b="0" i="0">
+                <a:solidFill>
+                  <a:srgbClr val="828282"/>
+                </a:solidFill>
+                <a:latin typeface="Arial"/>
+              </a:rPr>
+              <a:t>さらに大いなる事柄がまだ来ようとしています</a:t>
+            </a:r>
+          </a:p>
+        </p:txBody>
+      </p:sp>
     </p:spTree>
   </p:cSld>
   <p:clrMapOvr>
@@ -3773,6 +4193,41 @@
           </a:p>
         </p:txBody>
       </p:sp>
+      <p:sp>
+        <p:nvSpPr>
+          <p:cNvPr id="3" name="TextBox 2"/>
+          <p:cNvSpPr txBox="1"/>
+          <p:nvPr/>
+        </p:nvSpPr>
+        <p:spPr>
+          <a:xfrm>
+            <a:off x="640080" y="3845052"/>
+            <a:ext cx="10911535" cy="310896"/>
+          </a:xfrm>
+          <a:prstGeom prst="rect">
+            <a:avLst/>
+          </a:prstGeom>
+          <a:noFill/>
+        </p:spPr>
+        <p:txBody>
+          <a:bodyPr wrap="square">
+            <a:spAutoFit/>
+          </a:bodyPr>
+          <a:lstStyle/>
+          <a:p>
+            <a:pPr algn="ctr"/>
+            <a:r>
+              <a:rPr sz="2000" b="0" i="0">
+                <a:solidFill>
+                  <a:srgbClr val="828282"/>
+                </a:solidFill>
+                <a:latin typeface="Arial"/>
+              </a:rPr>
+              <a:t>そして大いなる事柄がまだこの都市で成し遂げられるでしょう</a:t>
+            </a:r>
+          </a:p>
+        </p:txBody>
+      </p:sp>
     </p:spTree>
   </p:cSld>
   <p:clrMapOvr>
@@ -3869,6 +4324,76 @@
           </a:p>
         </p:txBody>
       </p:sp>
+      <p:sp>
+        <p:nvSpPr>
+          <p:cNvPr id="4" name="TextBox 3"/>
+          <p:cNvSpPr txBox="1"/>
+          <p:nvPr/>
+        </p:nvSpPr>
+        <p:spPr>
+          <a:xfrm>
+            <a:off x="640080" y="4128516"/>
+            <a:ext cx="10911535" cy="310896"/>
+          </a:xfrm>
+          <a:prstGeom prst="rect">
+            <a:avLst/>
+          </a:prstGeom>
+          <a:noFill/>
+        </p:spPr>
+        <p:txBody>
+          <a:bodyPr wrap="square">
+            <a:spAutoFit/>
+          </a:bodyPr>
+          <a:lstStyle/>
+          <a:p>
+            <a:pPr algn="ctr"/>
+            <a:r>
+              <a:rPr sz="2000" b="0" i="0">
+                <a:solidFill>
+                  <a:srgbClr val="828282"/>
+                </a:solidFill>
+                <a:latin typeface="Arial"/>
+              </a:rPr>
+              <a:t>私たちの神のようなお方はいません</a:t>
+            </a:r>
+          </a:p>
+        </p:txBody>
+      </p:sp>
+      <p:sp>
+        <p:nvSpPr>
+          <p:cNvPr id="5" name="TextBox 4"/>
+          <p:cNvSpPr txBox="1"/>
+          <p:nvPr/>
+        </p:nvSpPr>
+        <p:spPr>
+          <a:xfrm>
+            <a:off x="640080" y="4494276"/>
+            <a:ext cx="10911535" cy="310896"/>
+          </a:xfrm>
+          <a:prstGeom prst="rect">
+            <a:avLst/>
+          </a:prstGeom>
+          <a:noFill/>
+        </p:spPr>
+        <p:txBody>
+          <a:bodyPr wrap="square">
+            <a:spAutoFit/>
+          </a:bodyPr>
+          <a:lstStyle/>
+          <a:p>
+            <a:pPr algn="ctr"/>
+            <a:r>
+              <a:rPr sz="2000" b="0" i="0">
+                <a:solidFill>
+                  <a:srgbClr val="828282"/>
+                </a:solidFill>
+                <a:latin typeface="Arial"/>
+              </a:rPr>
+              <a:t>さらに大いなる事柄がまだ来ようとしています</a:t>
+            </a:r>
+          </a:p>
+        </p:txBody>
+      </p:sp>
     </p:spTree>
   </p:cSld>
   <p:clrMapOvr>
@@ -3965,6 +4490,76 @@
           </a:p>
         </p:txBody>
       </p:sp>
+      <p:sp>
+        <p:nvSpPr>
+          <p:cNvPr id="4" name="TextBox 3"/>
+          <p:cNvSpPr txBox="1"/>
+          <p:nvPr/>
+        </p:nvSpPr>
+        <p:spPr>
+          <a:xfrm>
+            <a:off x="640080" y="4128516"/>
+            <a:ext cx="10911535" cy="310896"/>
+          </a:xfrm>
+          <a:prstGeom prst="rect">
+            <a:avLst/>
+          </a:prstGeom>
+          <a:noFill/>
+        </p:spPr>
+        <p:txBody>
+          <a:bodyPr wrap="square">
+            <a:spAutoFit/>
+          </a:bodyPr>
+          <a:lstStyle/>
+          <a:p>
+            <a:pPr algn="ctr"/>
+            <a:r>
+              <a:rPr sz="2000" b="0" i="0">
+                <a:solidFill>
+                  <a:srgbClr val="828282"/>
+                </a:solidFill>
+                <a:latin typeface="Arial"/>
+              </a:rPr>
+              <a:t>そして大いなる事柄がまだこの都市で成し遂げられるでしょう</a:t>
+            </a:r>
+          </a:p>
+        </p:txBody>
+      </p:sp>
+      <p:sp>
+        <p:nvSpPr>
+          <p:cNvPr id="5" name="TextBox 4"/>
+          <p:cNvSpPr txBox="1"/>
+          <p:nvPr/>
+        </p:nvSpPr>
+        <p:spPr>
+          <a:xfrm>
+            <a:off x="640080" y="4494276"/>
+            <a:ext cx="10911535" cy="310896"/>
+          </a:xfrm>
+          <a:prstGeom prst="rect">
+            <a:avLst/>
+          </a:prstGeom>
+          <a:noFill/>
+        </p:spPr>
+        <p:txBody>
+          <a:bodyPr wrap="square">
+            <a:spAutoFit/>
+          </a:bodyPr>
+          <a:lstStyle/>
+          <a:p>
+            <a:pPr algn="ctr"/>
+            <a:r>
+              <a:rPr sz="2000" b="0" i="0">
+                <a:solidFill>
+                  <a:srgbClr val="828282"/>
+                </a:solidFill>
+                <a:latin typeface="Arial"/>
+              </a:rPr>
+              <a:t>この都市で</a:t>
+            </a:r>
+          </a:p>
+        </p:txBody>
+      </p:sp>
     </p:spTree>
   </p:cSld>
   <p:clrMapOvr>
@@ -4061,6 +4656,76 @@
           </a:p>
         </p:txBody>
       </p:sp>
+      <p:sp>
+        <p:nvSpPr>
+          <p:cNvPr id="4" name="TextBox 3"/>
+          <p:cNvSpPr txBox="1"/>
+          <p:nvPr/>
+        </p:nvSpPr>
+        <p:spPr>
+          <a:xfrm>
+            <a:off x="640080" y="4128516"/>
+            <a:ext cx="10911535" cy="310896"/>
+          </a:xfrm>
+          <a:prstGeom prst="rect">
+            <a:avLst/>
+          </a:prstGeom>
+          <a:noFill/>
+        </p:spPr>
+        <p:txBody>
+          <a:bodyPr wrap="square">
+            <a:spAutoFit/>
+          </a:bodyPr>
+          <a:lstStyle/>
+          <a:p>
+            <a:pPr algn="ctr"/>
+            <a:r>
+              <a:rPr sz="2000" b="0" i="0">
+                <a:solidFill>
+                  <a:srgbClr val="828282"/>
+                </a:solidFill>
+                <a:latin typeface="Arial"/>
+              </a:rPr>
+              <a:t>あなたはこの都市の神です</a:t>
+            </a:r>
+          </a:p>
+        </p:txBody>
+      </p:sp>
+      <p:sp>
+        <p:nvSpPr>
+          <p:cNvPr id="5" name="TextBox 4"/>
+          <p:cNvSpPr txBox="1"/>
+          <p:nvPr/>
+        </p:nvSpPr>
+        <p:spPr>
+          <a:xfrm>
+            <a:off x="640080" y="4494276"/>
+            <a:ext cx="10911535" cy="310896"/>
+          </a:xfrm>
+          <a:prstGeom prst="rect">
+            <a:avLst/>
+          </a:prstGeom>
+          <a:noFill/>
+        </p:spPr>
+        <p:txBody>
+          <a:bodyPr wrap="square">
+            <a:spAutoFit/>
+          </a:bodyPr>
+          <a:lstStyle/>
+          <a:p>
+            <a:pPr algn="ctr"/>
+            <a:r>
+              <a:rPr sz="2000" b="0" i="0">
+                <a:solidFill>
+                  <a:srgbClr val="828282"/>
+                </a:solidFill>
+                <a:latin typeface="Arial"/>
+              </a:rPr>
+              <a:t>あなたはこの民の王です</a:t>
+            </a:r>
+          </a:p>
+        </p:txBody>
+      </p:sp>
     </p:spTree>
   </p:cSld>
   <p:clrMapOvr>
@@ -4157,6 +4822,76 @@
           </a:p>
         </p:txBody>
       </p:sp>
+      <p:sp>
+        <p:nvSpPr>
+          <p:cNvPr id="4" name="TextBox 3"/>
+          <p:cNvSpPr txBox="1"/>
+          <p:nvPr/>
+        </p:nvSpPr>
+        <p:spPr>
+          <a:xfrm>
+            <a:off x="640080" y="4128516"/>
+            <a:ext cx="10911535" cy="310896"/>
+          </a:xfrm>
+          <a:prstGeom prst="rect">
+            <a:avLst/>
+          </a:prstGeom>
+          <a:noFill/>
+        </p:spPr>
+        <p:txBody>
+          <a:bodyPr wrap="square">
+            <a:spAutoFit/>
+          </a:bodyPr>
+          <a:lstStyle/>
+          <a:p>
+            <a:pPr algn="ctr"/>
+            <a:r>
+              <a:rPr sz="2000" b="0" i="0">
+                <a:solidFill>
+                  <a:srgbClr val="828282"/>
+                </a:solidFill>
+                <a:latin typeface="Arial"/>
+              </a:rPr>
+              <a:t>あなたは不安な者たちの平和です</a:t>
+            </a:r>
+          </a:p>
+        </p:txBody>
+      </p:sp>
+      <p:sp>
+        <p:nvSpPr>
+          <p:cNvPr id="5" name="TextBox 4"/>
+          <p:cNvSpPr txBox="1"/>
+          <p:nvPr/>
+        </p:nvSpPr>
+        <p:spPr>
+          <a:xfrm>
+            <a:off x="640080" y="4494276"/>
+            <a:ext cx="10911535" cy="310896"/>
+          </a:xfrm>
+          <a:prstGeom prst="rect">
+            <a:avLst/>
+          </a:prstGeom>
+          <a:noFill/>
+        </p:spPr>
+        <p:txBody>
+          <a:bodyPr wrap="square">
+            <a:spAutoFit/>
+          </a:bodyPr>
+          <a:lstStyle/>
+          <a:p>
+            <a:pPr algn="ctr"/>
+            <a:r>
+              <a:rPr sz="2000" b="0" i="0">
+                <a:solidFill>
+                  <a:srgbClr val="828282"/>
+                </a:solidFill>
+                <a:latin typeface="Arial"/>
+              </a:rPr>
+              <a:t>あなたです</a:t>
+            </a:r>
+          </a:p>
+        </p:txBody>
+      </p:sp>
     </p:spTree>
   </p:cSld>
   <p:clrMapOvr>
@@ -4253,6 +4988,76 @@
           </a:p>
         </p:txBody>
       </p:sp>
+      <p:sp>
+        <p:nvSpPr>
+          <p:cNvPr id="4" name="TextBox 3"/>
+          <p:cNvSpPr txBox="1"/>
+          <p:nvPr/>
+        </p:nvSpPr>
+        <p:spPr>
+          <a:xfrm>
+            <a:off x="640080" y="4128516"/>
+            <a:ext cx="10911535" cy="310896"/>
+          </a:xfrm>
+          <a:prstGeom prst="rect">
+            <a:avLst/>
+          </a:prstGeom>
+          <a:noFill/>
+        </p:spPr>
+        <p:txBody>
+          <a:bodyPr wrap="square">
+            <a:spAutoFit/>
+          </a:bodyPr>
+          <a:lstStyle/>
+          <a:p>
+            <a:pPr algn="ctr"/>
+            <a:r>
+              <a:rPr sz="2000" b="0" i="0">
+                <a:solidFill>
+                  <a:srgbClr val="828282"/>
+                </a:solidFill>
+                <a:latin typeface="Arial"/>
+              </a:rPr>
+              <a:t>あなたはこの民の王です</a:t>
+            </a:r>
+          </a:p>
+        </p:txBody>
+      </p:sp>
+      <p:sp>
+        <p:nvSpPr>
+          <p:cNvPr id="5" name="TextBox 4"/>
+          <p:cNvSpPr txBox="1"/>
+          <p:nvPr/>
+        </p:nvSpPr>
+        <p:spPr>
+          <a:xfrm>
+            <a:off x="640080" y="4494276"/>
+            <a:ext cx="10911535" cy="310896"/>
+          </a:xfrm>
+          <a:prstGeom prst="rect">
+            <a:avLst/>
+          </a:prstGeom>
+          <a:noFill/>
+        </p:spPr>
+        <p:txBody>
+          <a:bodyPr wrap="square">
+            <a:spAutoFit/>
+          </a:bodyPr>
+          <a:lstStyle/>
+          <a:p>
+            <a:pPr algn="ctr"/>
+            <a:r>
+              <a:rPr sz="2000" b="0" i="0">
+                <a:solidFill>
+                  <a:srgbClr val="828282"/>
+                </a:solidFill>
+                <a:latin typeface="Arial"/>
+              </a:rPr>
+              <a:t>あなたはこの国の主です</a:t>
+            </a:r>
+          </a:p>
+        </p:txBody>
+      </p:sp>
     </p:spTree>
   </p:cSld>
   <p:clrMapOvr>
@@ -4349,6 +5154,76 @@
           </a:p>
         </p:txBody>
       </p:sp>
+      <p:sp>
+        <p:nvSpPr>
+          <p:cNvPr id="4" name="TextBox 3"/>
+          <p:cNvSpPr txBox="1"/>
+          <p:nvPr/>
+        </p:nvSpPr>
+        <p:spPr>
+          <a:xfrm>
+            <a:off x="640080" y="4128516"/>
+            <a:ext cx="10911535" cy="310896"/>
+          </a:xfrm>
+          <a:prstGeom prst="rect">
+            <a:avLst/>
+          </a:prstGeom>
+          <a:noFill/>
+        </p:spPr>
+        <p:txBody>
+          <a:bodyPr wrap="square">
+            <a:spAutoFit/>
+          </a:bodyPr>
+          <a:lstStyle/>
+          <a:p>
+            <a:pPr algn="ctr"/>
+            <a:r>
+              <a:rPr sz="2000" b="0" i="0">
+                <a:solidFill>
+                  <a:srgbClr val="828282"/>
+                </a:solidFill>
+                <a:latin typeface="Arial"/>
+              </a:rPr>
+              <a:t>私たちの神のようなお方はいません</a:t>
+            </a:r>
+          </a:p>
+        </p:txBody>
+      </p:sp>
+      <p:sp>
+        <p:nvSpPr>
+          <p:cNvPr id="5" name="TextBox 4"/>
+          <p:cNvSpPr txBox="1"/>
+          <p:nvPr/>
+        </p:nvSpPr>
+        <p:spPr>
+          <a:xfrm>
+            <a:off x="640080" y="4494276"/>
+            <a:ext cx="10911535" cy="310896"/>
+          </a:xfrm>
+          <a:prstGeom prst="rect">
+            <a:avLst/>
+          </a:prstGeom>
+          <a:noFill/>
+        </p:spPr>
+        <p:txBody>
+          <a:bodyPr wrap="square">
+            <a:spAutoFit/>
+          </a:bodyPr>
+          <a:lstStyle/>
+          <a:p>
+            <a:pPr algn="ctr"/>
+            <a:r>
+              <a:rPr sz="2000" b="0" i="0">
+                <a:solidFill>
+                  <a:srgbClr val="828282"/>
+                </a:solidFill>
+                <a:latin typeface="Arial"/>
+              </a:rPr>
+              <a:t>私たちの神のようなお方はいません</a:t>
+            </a:r>
+          </a:p>
+        </p:txBody>
+      </p:sp>
     </p:spTree>
   </p:cSld>
   <p:clrMapOvr>
@@ -4445,6 +5320,76 @@
           </a:p>
         </p:txBody>
       </p:sp>
+      <p:sp>
+        <p:nvSpPr>
+          <p:cNvPr id="4" name="TextBox 3"/>
+          <p:cNvSpPr txBox="1"/>
+          <p:nvPr/>
+        </p:nvSpPr>
+        <p:spPr>
+          <a:xfrm>
+            <a:off x="640080" y="4128516"/>
+            <a:ext cx="10911535" cy="310896"/>
+          </a:xfrm>
+          <a:prstGeom prst="rect">
+            <a:avLst/>
+          </a:prstGeom>
+          <a:noFill/>
+        </p:spPr>
+        <p:txBody>
+          <a:bodyPr wrap="square">
+            <a:spAutoFit/>
+          </a:bodyPr>
+          <a:lstStyle/>
+          <a:p>
+            <a:pPr algn="ctr"/>
+            <a:r>
+              <a:rPr sz="2000" b="0" i="0">
+                <a:solidFill>
+                  <a:srgbClr val="828282"/>
+                </a:solidFill>
+                <a:latin typeface="Arial"/>
+              </a:rPr>
+              <a:t>さらに大いなる事柄がまだ来ようとしています</a:t>
+            </a:r>
+          </a:p>
+        </p:txBody>
+      </p:sp>
+      <p:sp>
+        <p:nvSpPr>
+          <p:cNvPr id="5" name="TextBox 4"/>
+          <p:cNvSpPr txBox="1"/>
+          <p:nvPr/>
+        </p:nvSpPr>
+        <p:spPr>
+          <a:xfrm>
+            <a:off x="640080" y="4494276"/>
+            <a:ext cx="10911535" cy="310896"/>
+          </a:xfrm>
+          <a:prstGeom prst="rect">
+            <a:avLst/>
+          </a:prstGeom>
+          <a:noFill/>
+        </p:spPr>
+        <p:txBody>
+          <a:bodyPr wrap="square">
+            <a:spAutoFit/>
+          </a:bodyPr>
+          <a:lstStyle/>
+          <a:p>
+            <a:pPr algn="ctr"/>
+            <a:r>
+              <a:rPr sz="2000" b="0" i="0">
+                <a:solidFill>
+                  <a:srgbClr val="828282"/>
+                </a:solidFill>
+                <a:latin typeface="Arial"/>
+              </a:rPr>
+              <a:t>そして大いなる事柄がまだこの都市で成し遂げられるでしょう</a:t>
+            </a:r>
+          </a:p>
+        </p:txBody>
+      </p:sp>
     </p:spTree>
   </p:cSld>
   <p:clrMapOvr>
@@ -4541,6 +5486,76 @@
           </a:p>
         </p:txBody>
       </p:sp>
+      <p:sp>
+        <p:nvSpPr>
+          <p:cNvPr id="4" name="TextBox 3"/>
+          <p:cNvSpPr txBox="1"/>
+          <p:nvPr/>
+        </p:nvSpPr>
+        <p:spPr>
+          <a:xfrm>
+            <a:off x="640080" y="4128516"/>
+            <a:ext cx="10911535" cy="310896"/>
+          </a:xfrm>
+          <a:prstGeom prst="rect">
+            <a:avLst/>
+          </a:prstGeom>
+          <a:noFill/>
+        </p:spPr>
+        <p:txBody>
+          <a:bodyPr wrap="square">
+            <a:spAutoFit/>
+          </a:bodyPr>
+          <a:lstStyle/>
+          <a:p>
+            <a:pPr algn="ctr"/>
+            <a:r>
+              <a:rPr sz="2000" b="0" i="0">
+                <a:solidFill>
+                  <a:srgbClr val="828282"/>
+                </a:solidFill>
+                <a:latin typeface="Arial"/>
+              </a:rPr>
+              <a:t>この都市で</a:t>
+            </a:r>
+          </a:p>
+        </p:txBody>
+      </p:sp>
+      <p:sp>
+        <p:nvSpPr>
+          <p:cNvPr id="5" name="TextBox 4"/>
+          <p:cNvSpPr txBox="1"/>
+          <p:nvPr/>
+        </p:nvSpPr>
+        <p:spPr>
+          <a:xfrm>
+            <a:off x="640080" y="4494276"/>
+            <a:ext cx="10911535" cy="310896"/>
+          </a:xfrm>
+          <a:prstGeom prst="rect">
+            <a:avLst/>
+          </a:prstGeom>
+          <a:noFill/>
+        </p:spPr>
+        <p:txBody>
+          <a:bodyPr wrap="square">
+            <a:spAutoFit/>
+          </a:bodyPr>
+          <a:lstStyle/>
+          <a:p>
+            <a:pPr algn="ctr"/>
+            <a:r>
+              <a:rPr sz="2000" b="0" i="0">
+                <a:solidFill>
+                  <a:srgbClr val="828282"/>
+                </a:solidFill>
+                <a:latin typeface="Arial"/>
+              </a:rPr>
+              <a:t>私たちは信じます！</a:t>
+            </a:r>
+          </a:p>
+        </p:txBody>
+      </p:sp>
     </p:spTree>
   </p:cSld>
   <p:clrMapOvr>
@@ -4637,6 +5652,76 @@
           </a:p>
         </p:txBody>
       </p:sp>
+      <p:sp>
+        <p:nvSpPr>
+          <p:cNvPr id="4" name="TextBox 3"/>
+          <p:cNvSpPr txBox="1"/>
+          <p:nvPr/>
+        </p:nvSpPr>
+        <p:spPr>
+          <a:xfrm>
+            <a:off x="640080" y="4128516"/>
+            <a:ext cx="10911535" cy="310896"/>
+          </a:xfrm>
+          <a:prstGeom prst="rect">
+            <a:avLst/>
+          </a:prstGeom>
+          <a:noFill/>
+        </p:spPr>
+        <p:txBody>
+          <a:bodyPr wrap="square">
+            <a:spAutoFit/>
+          </a:bodyPr>
+          <a:lstStyle/>
+          <a:p>
+            <a:pPr algn="ctr"/>
+            <a:r>
+              <a:rPr sz="2000" b="0" i="0">
+                <a:solidFill>
+                  <a:srgbClr val="828282"/>
+                </a:solidFill>
+                <a:latin typeface="Arial"/>
+              </a:rPr>
+              <a:t>私たちはあなたを信じます、神よ</a:t>
+            </a:r>
+          </a:p>
+        </p:txBody>
+      </p:sp>
+      <p:sp>
+        <p:nvSpPr>
+          <p:cNvPr id="5" name="TextBox 4"/>
+          <p:cNvSpPr txBox="1"/>
+          <p:nvPr/>
+        </p:nvSpPr>
+        <p:spPr>
+          <a:xfrm>
+            <a:off x="640080" y="4494276"/>
+            <a:ext cx="10911535" cy="310896"/>
+          </a:xfrm>
+          <a:prstGeom prst="rect">
+            <a:avLst/>
+          </a:prstGeom>
+          <a:noFill/>
+        </p:spPr>
+        <p:txBody>
+          <a:bodyPr wrap="square">
+            <a:spAutoFit/>
+          </a:bodyPr>
+          <a:lstStyle/>
+          <a:p>
+            <a:pPr algn="ctr"/>
+            <a:r>
+              <a:rPr sz="2000" b="0" i="0">
+                <a:solidFill>
+                  <a:srgbClr val="828282"/>
+                </a:solidFill>
+                <a:latin typeface="Arial"/>
+              </a:rPr>
+              <a:t>さらに大いなる事柄がまだ来ようとしています</a:t>
+            </a:r>
+          </a:p>
+        </p:txBody>
+      </p:sp>
     </p:spTree>
   </p:cSld>
   <p:clrMapOvr>
@@ -4698,6 +5783,41 @@
           </a:p>
         </p:txBody>
       </p:sp>
+      <p:sp>
+        <p:nvSpPr>
+          <p:cNvPr id="3" name="TextBox 2"/>
+          <p:cNvSpPr txBox="1"/>
+          <p:nvPr/>
+        </p:nvSpPr>
+        <p:spPr>
+          <a:xfrm>
+            <a:off x="640080" y="3845052"/>
+            <a:ext cx="10911535" cy="310896"/>
+          </a:xfrm>
+          <a:prstGeom prst="rect">
+            <a:avLst/>
+          </a:prstGeom>
+          <a:noFill/>
+        </p:spPr>
+        <p:txBody>
+          <a:bodyPr wrap="square">
+            <a:spAutoFit/>
+          </a:bodyPr>
+          <a:lstStyle/>
+          <a:p>
+            <a:pPr algn="ctr"/>
+            <a:r>
+              <a:rPr sz="2000" b="0" i="0">
+                <a:solidFill>
+                  <a:srgbClr val="828282"/>
+                </a:solidFill>
+                <a:latin typeface="Arial"/>
+              </a:rPr>
+              <a:t>そして大いなる事柄がまだこの都市で成し遂げられるでしょう</a:t>
+            </a:r>
+          </a:p>
+        </p:txBody>
+      </p:sp>
     </p:spTree>
   </p:cSld>
   <p:clrMapOvr>
@@ -5974,6 +7094,76 @@
           </a:p>
         </p:txBody>
       </p:sp>
+      <p:sp>
+        <p:nvSpPr>
+          <p:cNvPr id="4" name="TextBox 3"/>
+          <p:cNvSpPr txBox="1"/>
+          <p:nvPr/>
+        </p:nvSpPr>
+        <p:spPr>
+          <a:xfrm>
+            <a:off x="640080" y="4128516"/>
+            <a:ext cx="10911535" cy="310896"/>
+          </a:xfrm>
+          <a:prstGeom prst="rect">
+            <a:avLst/>
+          </a:prstGeom>
+          <a:noFill/>
+        </p:spPr>
+        <p:txBody>
+          <a:bodyPr wrap="square">
+            <a:spAutoFit/>
+          </a:bodyPr>
+          <a:lstStyle/>
+          <a:p>
+            <a:pPr algn="ctr"/>
+            <a:r>
+              <a:rPr sz="2000" b="0" i="0">
+                <a:solidFill>
+                  <a:srgbClr val="828282"/>
+                </a:solidFill>
+                <a:latin typeface="Arial"/>
+              </a:rPr>
+              <a:t>あなたです</a:t>
+            </a:r>
+          </a:p>
+        </p:txBody>
+      </p:sp>
+      <p:sp>
+        <p:nvSpPr>
+          <p:cNvPr id="5" name="TextBox 4"/>
+          <p:cNvSpPr txBox="1"/>
+          <p:nvPr/>
+        </p:nvSpPr>
+        <p:spPr>
+          <a:xfrm>
+            <a:off x="640080" y="4494276"/>
+            <a:ext cx="10911535" cy="310896"/>
+          </a:xfrm>
+          <a:prstGeom prst="rect">
+            <a:avLst/>
+          </a:prstGeom>
+          <a:noFill/>
+        </p:spPr>
+        <p:txBody>
+          <a:bodyPr wrap="square">
+            <a:spAutoFit/>
+          </a:bodyPr>
+          <a:lstStyle/>
+          <a:p>
+            <a:pPr algn="ctr"/>
+            <a:r>
+              <a:rPr sz="2000" b="0" i="0">
+                <a:solidFill>
+                  <a:srgbClr val="828282"/>
+                </a:solidFill>
+                <a:latin typeface="Arial"/>
+              </a:rPr>
+              <a:t>あなたは暗闇の光です</a:t>
+            </a:r>
+          </a:p>
+        </p:txBody>
+      </p:sp>
     </p:spTree>
   </p:cSld>
   <p:clrMapOvr>
@@ -6070,6 +7260,76 @@
           </a:p>
         </p:txBody>
       </p:sp>
+      <p:sp>
+        <p:nvSpPr>
+          <p:cNvPr id="4" name="TextBox 3"/>
+          <p:cNvSpPr txBox="1"/>
+          <p:nvPr/>
+        </p:nvSpPr>
+        <p:spPr>
+          <a:xfrm>
+            <a:off x="640080" y="4128516"/>
+            <a:ext cx="10911535" cy="310896"/>
+          </a:xfrm>
+          <a:prstGeom prst="rect">
+            <a:avLst/>
+          </a:prstGeom>
+          <a:noFill/>
+        </p:spPr>
+        <p:txBody>
+          <a:bodyPr wrap="square">
+            <a:spAutoFit/>
+          </a:bodyPr>
+          <a:lstStyle/>
+          <a:p>
+            <a:pPr algn="ctr"/>
+            <a:r>
+              <a:rPr sz="2000" b="0" i="0">
+                <a:solidFill>
+                  <a:srgbClr val="828282"/>
+                </a:solidFill>
+                <a:latin typeface="Arial"/>
+              </a:rPr>
+              <a:t>あなたです</a:t>
+            </a:r>
+          </a:p>
+        </p:txBody>
+      </p:sp>
+      <p:sp>
+        <p:nvSpPr>
+          <p:cNvPr id="5" name="TextBox 4"/>
+          <p:cNvSpPr txBox="1"/>
+          <p:nvPr/>
+        </p:nvSpPr>
+        <p:spPr>
+          <a:xfrm>
+            <a:off x="640080" y="4494276"/>
+            <a:ext cx="10911535" cy="310896"/>
+          </a:xfrm>
+          <a:prstGeom prst="rect">
+            <a:avLst/>
+          </a:prstGeom>
+          <a:noFill/>
+        </p:spPr>
+        <p:txBody>
+          <a:bodyPr wrap="square">
+            <a:spAutoFit/>
+          </a:bodyPr>
+          <a:lstStyle/>
+          <a:p>
+            <a:pPr algn="ctr"/>
+            <a:r>
+              <a:rPr sz="2000" b="0" i="0">
+                <a:solidFill>
+                  <a:srgbClr val="828282"/>
+                </a:solidFill>
+                <a:latin typeface="Arial"/>
+              </a:rPr>
+              <a:t>私たちの神のようなお方はいません</a:t>
+            </a:r>
+          </a:p>
+        </p:txBody>
+      </p:sp>
     </p:spTree>
   </p:cSld>
   <p:clrMapOvr>
@@ -6166,6 +7426,76 @@
           </a:p>
         </p:txBody>
       </p:sp>
+      <p:sp>
+        <p:nvSpPr>
+          <p:cNvPr id="4" name="TextBox 3"/>
+          <p:cNvSpPr txBox="1"/>
+          <p:nvPr/>
+        </p:nvSpPr>
+        <p:spPr>
+          <a:xfrm>
+            <a:off x="640080" y="4128516"/>
+            <a:ext cx="10911535" cy="310896"/>
+          </a:xfrm>
+          <a:prstGeom prst="rect">
+            <a:avLst/>
+          </a:prstGeom>
+          <a:noFill/>
+        </p:spPr>
+        <p:txBody>
+          <a:bodyPr wrap="square">
+            <a:spAutoFit/>
+          </a:bodyPr>
+          <a:lstStyle/>
+          <a:p>
+            <a:pPr algn="ctr"/>
+            <a:r>
+              <a:rPr sz="2000" b="0" i="0">
+                <a:solidFill>
+                  <a:srgbClr val="828282"/>
+                </a:solidFill>
+                <a:latin typeface="Arial"/>
+              </a:rPr>
+              <a:t>あなたは暗闇の光です</a:t>
+            </a:r>
+          </a:p>
+        </p:txBody>
+      </p:sp>
+      <p:sp>
+        <p:nvSpPr>
+          <p:cNvPr id="5" name="TextBox 4"/>
+          <p:cNvSpPr txBox="1"/>
+          <p:nvPr/>
+        </p:nvSpPr>
+        <p:spPr>
+          <a:xfrm>
+            <a:off x="640080" y="4494276"/>
+            <a:ext cx="10911535" cy="310896"/>
+          </a:xfrm>
+          <a:prstGeom prst="rect">
+            <a:avLst/>
+          </a:prstGeom>
+          <a:noFill/>
+        </p:spPr>
+        <p:txBody>
+          <a:bodyPr wrap="square">
+            <a:spAutoFit/>
+          </a:bodyPr>
+          <a:lstStyle/>
+          <a:p>
+            <a:pPr algn="ctr"/>
+            <a:r>
+              <a:rPr sz="2000" b="0" i="0">
+                <a:solidFill>
+                  <a:srgbClr val="828282"/>
+                </a:solidFill>
+                <a:latin typeface="Arial"/>
+              </a:rPr>
+              <a:t>あなたは絶望した者たちの希望です</a:t>
+            </a:r>
+          </a:p>
+        </p:txBody>
+      </p:sp>
     </p:spTree>
   </p:cSld>
   <p:clrMapOvr>
@@ -6262,6 +7592,76 @@
           </a:p>
         </p:txBody>
       </p:sp>
+      <p:sp>
+        <p:nvSpPr>
+          <p:cNvPr id="4" name="TextBox 3"/>
+          <p:cNvSpPr txBox="1"/>
+          <p:nvPr/>
+        </p:nvSpPr>
+        <p:spPr>
+          <a:xfrm>
+            <a:off x="640080" y="4128516"/>
+            <a:ext cx="10911535" cy="310896"/>
+          </a:xfrm>
+          <a:prstGeom prst="rect">
+            <a:avLst/>
+          </a:prstGeom>
+          <a:noFill/>
+        </p:spPr>
+        <p:txBody>
+          <a:bodyPr wrap="square">
+            <a:spAutoFit/>
+          </a:bodyPr>
+          <a:lstStyle/>
+          <a:p>
+            <a:pPr algn="ctr"/>
+            <a:r>
+              <a:rPr sz="2000" b="0" i="0">
+                <a:solidFill>
+                  <a:srgbClr val="828282"/>
+                </a:solidFill>
+                <a:latin typeface="Arial"/>
+              </a:rPr>
+              <a:t>私たちの神のようなお方はいません</a:t>
+            </a:r>
+          </a:p>
+        </p:txBody>
+      </p:sp>
+      <p:sp>
+        <p:nvSpPr>
+          <p:cNvPr id="5" name="TextBox 4"/>
+          <p:cNvSpPr txBox="1"/>
+          <p:nvPr/>
+        </p:nvSpPr>
+        <p:spPr>
+          <a:xfrm>
+            <a:off x="640080" y="4494276"/>
+            <a:ext cx="10911535" cy="310896"/>
+          </a:xfrm>
+          <a:prstGeom prst="rect">
+            <a:avLst/>
+          </a:prstGeom>
+          <a:noFill/>
+        </p:spPr>
+        <p:txBody>
+          <a:bodyPr wrap="square">
+            <a:spAutoFit/>
+          </a:bodyPr>
+          <a:lstStyle/>
+          <a:p>
+            <a:pPr algn="ctr"/>
+            <a:r>
+              <a:rPr sz="2000" b="0" i="0">
+                <a:solidFill>
+                  <a:srgbClr val="828282"/>
+                </a:solidFill>
+                <a:latin typeface="Arial"/>
+              </a:rPr>
+              <a:t>さらに大いなる事柄がまだ来ようとしています</a:t>
+            </a:r>
+          </a:p>
+        </p:txBody>
+      </p:sp>
     </p:spTree>
   </p:cSld>
   <p:clrMapOvr>
@@ -6358,6 +7758,76 @@
           </a:p>
         </p:txBody>
       </p:sp>
+      <p:sp>
+        <p:nvSpPr>
+          <p:cNvPr id="4" name="TextBox 3"/>
+          <p:cNvSpPr txBox="1"/>
+          <p:nvPr/>
+        </p:nvSpPr>
+        <p:spPr>
+          <a:xfrm>
+            <a:off x="640080" y="4128516"/>
+            <a:ext cx="10911535" cy="310896"/>
+          </a:xfrm>
+          <a:prstGeom prst="rect">
+            <a:avLst/>
+          </a:prstGeom>
+          <a:noFill/>
+        </p:spPr>
+        <p:txBody>
+          <a:bodyPr wrap="square">
+            <a:spAutoFit/>
+          </a:bodyPr>
+          <a:lstStyle/>
+          <a:p>
+            <a:pPr algn="ctr"/>
+            <a:r>
+              <a:rPr sz="2000" b="0" i="0">
+                <a:solidFill>
+                  <a:srgbClr val="828282"/>
+                </a:solidFill>
+                <a:latin typeface="Arial"/>
+              </a:rPr>
+              <a:t>そして大いなる事柄がまだこの都市で成し遂げられるでしょう</a:t>
+            </a:r>
+          </a:p>
+        </p:txBody>
+      </p:sp>
+      <p:sp>
+        <p:nvSpPr>
+          <p:cNvPr id="5" name="TextBox 4"/>
+          <p:cNvSpPr txBox="1"/>
+          <p:nvPr/>
+        </p:nvSpPr>
+        <p:spPr>
+          <a:xfrm>
+            <a:off x="640080" y="4494276"/>
+            <a:ext cx="10911535" cy="310896"/>
+          </a:xfrm>
+          <a:prstGeom prst="rect">
+            <a:avLst/>
+          </a:prstGeom>
+          <a:noFill/>
+        </p:spPr>
+        <p:txBody>
+          <a:bodyPr wrap="square">
+            <a:spAutoFit/>
+          </a:bodyPr>
+          <a:lstStyle/>
+          <a:p>
+            <a:pPr algn="ctr"/>
+            <a:r>
+              <a:rPr sz="2000" b="0" i="0">
+                <a:solidFill>
+                  <a:srgbClr val="828282"/>
+                </a:solidFill>
+                <a:latin typeface="Arial"/>
+              </a:rPr>
+              <a:t>この都市で</a:t>
+            </a:r>
+          </a:p>
+        </p:txBody>
+      </p:sp>
     </p:spTree>
   </p:cSld>
   <p:clrMapOvr>
@@ -6454,6 +7924,76 @@
           </a:p>
         </p:txBody>
       </p:sp>
+      <p:sp>
+        <p:nvSpPr>
+          <p:cNvPr id="4" name="TextBox 3"/>
+          <p:cNvSpPr txBox="1"/>
+          <p:nvPr/>
+        </p:nvSpPr>
+        <p:spPr>
+          <a:xfrm>
+            <a:off x="640080" y="4128516"/>
+            <a:ext cx="10911535" cy="310896"/>
+          </a:xfrm>
+          <a:prstGeom prst="rect">
+            <a:avLst/>
+          </a:prstGeom>
+          <a:noFill/>
+        </p:spPr>
+        <p:txBody>
+          <a:bodyPr wrap="square">
+            <a:spAutoFit/>
+          </a:bodyPr>
+          <a:lstStyle/>
+          <a:p>
+            <a:pPr algn="ctr"/>
+            <a:r>
+              <a:rPr sz="2000" b="0" i="0">
+                <a:solidFill>
+                  <a:srgbClr val="828282"/>
+                </a:solidFill>
+                <a:latin typeface="Arial"/>
+              </a:rPr>
+              <a:t>あなたはこの都市の神です</a:t>
+            </a:r>
+          </a:p>
+        </p:txBody>
+      </p:sp>
+      <p:sp>
+        <p:nvSpPr>
+          <p:cNvPr id="5" name="TextBox 4"/>
+          <p:cNvSpPr txBox="1"/>
+          <p:nvPr/>
+        </p:nvSpPr>
+        <p:spPr>
+          <a:xfrm>
+            <a:off x="640080" y="4494276"/>
+            <a:ext cx="10911535" cy="310896"/>
+          </a:xfrm>
+          <a:prstGeom prst="rect">
+            <a:avLst/>
+          </a:prstGeom>
+          <a:noFill/>
+        </p:spPr>
+        <p:txBody>
+          <a:bodyPr wrap="square">
+            <a:spAutoFit/>
+          </a:bodyPr>
+          <a:lstStyle/>
+          <a:p>
+            <a:pPr algn="ctr"/>
+            <a:r>
+              <a:rPr sz="2000" b="0" i="0">
+                <a:solidFill>
+                  <a:srgbClr val="828282"/>
+                </a:solidFill>
+                <a:latin typeface="Arial"/>
+              </a:rPr>
+              <a:t>あなたはこの民の王です</a:t>
+            </a:r>
+          </a:p>
+        </p:txBody>
+      </p:sp>
     </p:spTree>
   </p:cSld>
   <p:clrMapOvr>
@@ -6550,6 +8090,76 @@
           </a:p>
         </p:txBody>
       </p:sp>
+      <p:sp>
+        <p:nvSpPr>
+          <p:cNvPr id="4" name="TextBox 3"/>
+          <p:cNvSpPr txBox="1"/>
+          <p:nvPr/>
+        </p:nvSpPr>
+        <p:spPr>
+          <a:xfrm>
+            <a:off x="640080" y="4128516"/>
+            <a:ext cx="10911535" cy="310896"/>
+          </a:xfrm>
+          <a:prstGeom prst="rect">
+            <a:avLst/>
+          </a:prstGeom>
+          <a:noFill/>
+        </p:spPr>
+        <p:txBody>
+          <a:bodyPr wrap="square">
+            <a:spAutoFit/>
+          </a:bodyPr>
+          <a:lstStyle/>
+          <a:p>
+            <a:pPr algn="ctr"/>
+            <a:r>
+              <a:rPr sz="2000" b="0" i="0">
+                <a:solidFill>
+                  <a:srgbClr val="828282"/>
+                </a:solidFill>
+                <a:latin typeface="Arial"/>
+              </a:rPr>
+              <a:t>あなたは不安な者たちの平和です</a:t>
+            </a:r>
+          </a:p>
+        </p:txBody>
+      </p:sp>
+      <p:sp>
+        <p:nvSpPr>
+          <p:cNvPr id="5" name="TextBox 4"/>
+          <p:cNvSpPr txBox="1"/>
+          <p:nvPr/>
+        </p:nvSpPr>
+        <p:spPr>
+          <a:xfrm>
+            <a:off x="640080" y="4494276"/>
+            <a:ext cx="10911535" cy="310896"/>
+          </a:xfrm>
+          <a:prstGeom prst="rect">
+            <a:avLst/>
+          </a:prstGeom>
+          <a:noFill/>
+        </p:spPr>
+        <p:txBody>
+          <a:bodyPr wrap="square">
+            <a:spAutoFit/>
+          </a:bodyPr>
+          <a:lstStyle/>
+          <a:p>
+            <a:pPr algn="ctr"/>
+            <a:r>
+              <a:rPr sz="2000" b="0" i="0">
+                <a:solidFill>
+                  <a:srgbClr val="828282"/>
+                </a:solidFill>
+                <a:latin typeface="Arial"/>
+              </a:rPr>
+              <a:t>あなたです</a:t>
+            </a:r>
+          </a:p>
+        </p:txBody>
+      </p:sp>
     </p:spTree>
   </p:cSld>
   <p:clrMapOvr>
@@ -6646,6 +8256,76 @@
           </a:p>
         </p:txBody>
       </p:sp>
+      <p:sp>
+        <p:nvSpPr>
+          <p:cNvPr id="4" name="TextBox 3"/>
+          <p:cNvSpPr txBox="1"/>
+          <p:nvPr/>
+        </p:nvSpPr>
+        <p:spPr>
+          <a:xfrm>
+            <a:off x="640080" y="4128516"/>
+            <a:ext cx="10911535" cy="310896"/>
+          </a:xfrm>
+          <a:prstGeom prst="rect">
+            <a:avLst/>
+          </a:prstGeom>
+          <a:noFill/>
+        </p:spPr>
+        <p:txBody>
+          <a:bodyPr wrap="square">
+            <a:spAutoFit/>
+          </a:bodyPr>
+          <a:lstStyle/>
+          <a:p>
+            <a:pPr algn="ctr"/>
+            <a:r>
+              <a:rPr sz="2000" b="0" i="0">
+                <a:solidFill>
+                  <a:srgbClr val="828282"/>
+                </a:solidFill>
+                <a:latin typeface="Arial"/>
+              </a:rPr>
+              <a:t>私たちの神のようなお方はいません</a:t>
+            </a:r>
+          </a:p>
+        </p:txBody>
+      </p:sp>
+      <p:sp>
+        <p:nvSpPr>
+          <p:cNvPr id="5" name="TextBox 4"/>
+          <p:cNvSpPr txBox="1"/>
+          <p:nvPr/>
+        </p:nvSpPr>
+        <p:spPr>
+          <a:xfrm>
+            <a:off x="640080" y="4494276"/>
+            <a:ext cx="10911535" cy="310896"/>
+          </a:xfrm>
+          <a:prstGeom prst="rect">
+            <a:avLst/>
+          </a:prstGeom>
+          <a:noFill/>
+        </p:spPr>
+        <p:txBody>
+          <a:bodyPr wrap="square">
+            <a:spAutoFit/>
+          </a:bodyPr>
+          <a:lstStyle/>
+          <a:p>
+            <a:pPr algn="ctr"/>
+            <a:r>
+              <a:rPr sz="2000" b="0" i="0">
+                <a:solidFill>
+                  <a:srgbClr val="828282"/>
+                </a:solidFill>
+                <a:latin typeface="Arial"/>
+              </a:rPr>
+              <a:t>私たちの神のようなお方はいません</a:t>
+            </a:r>
+          </a:p>
+        </p:txBody>
+      </p:sp>
     </p:spTree>
   </p:cSld>
   <p:clrMapOvr>
@@ -6742,6 +8422,76 @@
           </a:p>
         </p:txBody>
       </p:sp>
+      <p:sp>
+        <p:nvSpPr>
+          <p:cNvPr id="4" name="TextBox 3"/>
+          <p:cNvSpPr txBox="1"/>
+          <p:nvPr/>
+        </p:nvSpPr>
+        <p:spPr>
+          <a:xfrm>
+            <a:off x="640080" y="4128516"/>
+            <a:ext cx="10911535" cy="310896"/>
+          </a:xfrm>
+          <a:prstGeom prst="rect">
+            <a:avLst/>
+          </a:prstGeom>
+          <a:noFill/>
+        </p:spPr>
+        <p:txBody>
+          <a:bodyPr wrap="square">
+            <a:spAutoFit/>
+          </a:bodyPr>
+          <a:lstStyle/>
+          <a:p>
+            <a:pPr algn="ctr"/>
+            <a:r>
+              <a:rPr sz="2000" b="0" i="0">
+                <a:solidFill>
+                  <a:srgbClr val="828282"/>
+                </a:solidFill>
+                <a:latin typeface="Arial"/>
+              </a:rPr>
+              <a:t>さらに大いなる事柄がまだ来ようとしています</a:t>
+            </a:r>
+          </a:p>
+        </p:txBody>
+      </p:sp>
+      <p:sp>
+        <p:nvSpPr>
+          <p:cNvPr id="5" name="TextBox 4"/>
+          <p:cNvSpPr txBox="1"/>
+          <p:nvPr/>
+        </p:nvSpPr>
+        <p:spPr>
+          <a:xfrm>
+            <a:off x="640080" y="4494276"/>
+            <a:ext cx="10911535" cy="310896"/>
+          </a:xfrm>
+          <a:prstGeom prst="rect">
+            <a:avLst/>
+          </a:prstGeom>
+          <a:noFill/>
+        </p:spPr>
+        <p:txBody>
+          <a:bodyPr wrap="square">
+            <a:spAutoFit/>
+          </a:bodyPr>
+          <a:lstStyle/>
+          <a:p>
+            <a:pPr algn="ctr"/>
+            <a:r>
+              <a:rPr sz="2000" b="0" i="0">
+                <a:solidFill>
+                  <a:srgbClr val="828282"/>
+                </a:solidFill>
+                <a:latin typeface="Arial"/>
+              </a:rPr>
+              <a:t>そして大いなる事柄がまだこの都市で成し遂げられるでしょう</a:t>
+            </a:r>
+          </a:p>
+        </p:txBody>
+      </p:sp>
     </p:spTree>
   </p:cSld>
   <p:clrMapOvr>
@@ -6838,6 +8588,76 @@
           </a:p>
         </p:txBody>
       </p:sp>
+      <p:sp>
+        <p:nvSpPr>
+          <p:cNvPr id="4" name="TextBox 3"/>
+          <p:cNvSpPr txBox="1"/>
+          <p:nvPr/>
+        </p:nvSpPr>
+        <p:spPr>
+          <a:xfrm>
+            <a:off x="640080" y="4128516"/>
+            <a:ext cx="10911535" cy="310896"/>
+          </a:xfrm>
+          <a:prstGeom prst="rect">
+            <a:avLst/>
+          </a:prstGeom>
+          <a:noFill/>
+        </p:spPr>
+        <p:txBody>
+          <a:bodyPr wrap="square">
+            <a:spAutoFit/>
+          </a:bodyPr>
+          <a:lstStyle/>
+          <a:p>
+            <a:pPr algn="ctr"/>
+            <a:r>
+              <a:rPr sz="2000" b="0" i="0">
+                <a:solidFill>
+                  <a:srgbClr val="828282"/>
+                </a:solidFill>
+                <a:latin typeface="Arial"/>
+              </a:rPr>
+              <a:t>この都市で</a:t>
+            </a:r>
+          </a:p>
+        </p:txBody>
+      </p:sp>
+      <p:sp>
+        <p:nvSpPr>
+          <p:cNvPr id="5" name="TextBox 4"/>
+          <p:cNvSpPr txBox="1"/>
+          <p:nvPr/>
+        </p:nvSpPr>
+        <p:spPr>
+          <a:xfrm>
+            <a:off x="640080" y="4494276"/>
+            <a:ext cx="10911535" cy="310896"/>
+          </a:xfrm>
+          <a:prstGeom prst="rect">
+            <a:avLst/>
+          </a:prstGeom>
+          <a:noFill/>
+        </p:spPr>
+        <p:txBody>
+          <a:bodyPr wrap="square">
+            <a:spAutoFit/>
+          </a:bodyPr>
+          <a:lstStyle/>
+          <a:p>
+            <a:pPr algn="ctr"/>
+            <a:r>
+              <a:rPr sz="2000" b="0" i="0">
+                <a:solidFill>
+                  <a:srgbClr val="828282"/>
+                </a:solidFill>
+                <a:latin typeface="Arial"/>
+              </a:rPr>
+              <a:t>私たちは信じます！</a:t>
+            </a:r>
+          </a:p>
+        </p:txBody>
+      </p:sp>
     </p:spTree>
   </p:cSld>
   <p:clrMapOvr>
@@ -6934,6 +8754,76 @@
           </a:p>
         </p:txBody>
       </p:sp>
+      <p:sp>
+        <p:nvSpPr>
+          <p:cNvPr id="4" name="TextBox 3"/>
+          <p:cNvSpPr txBox="1"/>
+          <p:nvPr/>
+        </p:nvSpPr>
+        <p:spPr>
+          <a:xfrm>
+            <a:off x="640080" y="4128516"/>
+            <a:ext cx="10911535" cy="310896"/>
+          </a:xfrm>
+          <a:prstGeom prst="rect">
+            <a:avLst/>
+          </a:prstGeom>
+          <a:noFill/>
+        </p:spPr>
+        <p:txBody>
+          <a:bodyPr wrap="square">
+            <a:spAutoFit/>
+          </a:bodyPr>
+          <a:lstStyle/>
+          <a:p>
+            <a:pPr algn="ctr"/>
+            <a:r>
+              <a:rPr sz="2000" b="0" i="0">
+                <a:solidFill>
+                  <a:srgbClr val="828282"/>
+                </a:solidFill>
+                <a:latin typeface="Arial"/>
+              </a:rPr>
+              <a:t>私たちはあなたを信じます、神よ</a:t>
+            </a:r>
+          </a:p>
+        </p:txBody>
+      </p:sp>
+      <p:sp>
+        <p:nvSpPr>
+          <p:cNvPr id="5" name="TextBox 4"/>
+          <p:cNvSpPr txBox="1"/>
+          <p:nvPr/>
+        </p:nvSpPr>
+        <p:spPr>
+          <a:xfrm>
+            <a:off x="640080" y="4494276"/>
+            <a:ext cx="10911535" cy="310896"/>
+          </a:xfrm>
+          <a:prstGeom prst="rect">
+            <a:avLst/>
+          </a:prstGeom>
+          <a:noFill/>
+        </p:spPr>
+        <p:txBody>
+          <a:bodyPr wrap="square">
+            <a:spAutoFit/>
+          </a:bodyPr>
+          <a:lstStyle/>
+          <a:p>
+            <a:pPr algn="ctr"/>
+            <a:r>
+              <a:rPr sz="2000" b="0" i="0">
+                <a:solidFill>
+                  <a:srgbClr val="828282"/>
+                </a:solidFill>
+                <a:latin typeface="Arial"/>
+              </a:rPr>
+              <a:t>さらに大いなる事柄がまだ来ようとしています</a:t>
+            </a:r>
+          </a:p>
+        </p:txBody>
+      </p:sp>
     </p:spTree>
   </p:cSld>
   <p:clrMapOvr>
@@ -7030,6 +8920,76 @@
           </a:p>
         </p:txBody>
       </p:sp>
+      <p:sp>
+        <p:nvSpPr>
+          <p:cNvPr id="4" name="TextBox 3"/>
+          <p:cNvSpPr txBox="1"/>
+          <p:nvPr/>
+        </p:nvSpPr>
+        <p:spPr>
+          <a:xfrm>
+            <a:off x="640080" y="4128516"/>
+            <a:ext cx="10911535" cy="310896"/>
+          </a:xfrm>
+          <a:prstGeom prst="rect">
+            <a:avLst/>
+          </a:prstGeom>
+          <a:noFill/>
+        </p:spPr>
+        <p:txBody>
+          <a:bodyPr wrap="square">
+            <a:spAutoFit/>
+          </a:bodyPr>
+          <a:lstStyle/>
+          <a:p>
+            <a:pPr algn="ctr"/>
+            <a:r>
+              <a:rPr sz="2000" b="0" i="0">
+                <a:solidFill>
+                  <a:srgbClr val="828282"/>
+                </a:solidFill>
+                <a:latin typeface="Arial"/>
+              </a:rPr>
+              <a:t>あなたは絶望した者たちの希望です</a:t>
+            </a:r>
+          </a:p>
+        </p:txBody>
+      </p:sp>
+      <p:sp>
+        <p:nvSpPr>
+          <p:cNvPr id="5" name="TextBox 4"/>
+          <p:cNvSpPr txBox="1"/>
+          <p:nvPr/>
+        </p:nvSpPr>
+        <p:spPr>
+          <a:xfrm>
+            <a:off x="640080" y="4494276"/>
+            <a:ext cx="10911535" cy="310896"/>
+          </a:xfrm>
+          <a:prstGeom prst="rect">
+            <a:avLst/>
+          </a:prstGeom>
+          <a:noFill/>
+        </p:spPr>
+        <p:txBody>
+          <a:bodyPr wrap="square">
+            <a:spAutoFit/>
+          </a:bodyPr>
+          <a:lstStyle/>
+          <a:p>
+            <a:pPr algn="ctr"/>
+            <a:r>
+              <a:rPr sz="2000" b="0" i="0">
+                <a:solidFill>
+                  <a:srgbClr val="828282"/>
+                </a:solidFill>
+                <a:latin typeface="Arial"/>
+              </a:rPr>
+              <a:t>あなたは不安な者たちの平和です</a:t>
+            </a:r>
+          </a:p>
+        </p:txBody>
+      </p:sp>
     </p:spTree>
   </p:cSld>
   <p:clrMapOvr>
@@ -7091,6 +9051,41 @@
           </a:p>
         </p:txBody>
       </p:sp>
+      <p:sp>
+        <p:nvSpPr>
+          <p:cNvPr id="3" name="TextBox 2"/>
+          <p:cNvSpPr txBox="1"/>
+          <p:nvPr/>
+        </p:nvSpPr>
+        <p:spPr>
+          <a:xfrm>
+            <a:off x="640080" y="3845052"/>
+            <a:ext cx="10911535" cy="310896"/>
+          </a:xfrm>
+          <a:prstGeom prst="rect">
+            <a:avLst/>
+          </a:prstGeom>
+          <a:noFill/>
+        </p:spPr>
+        <p:txBody>
+          <a:bodyPr wrap="square">
+            <a:spAutoFit/>
+          </a:bodyPr>
+          <a:lstStyle/>
+          <a:p>
+            <a:pPr algn="ctr"/>
+            <a:r>
+              <a:rPr sz="2000" b="0" i="0">
+                <a:solidFill>
+                  <a:srgbClr val="828282"/>
+                </a:solidFill>
+                <a:latin typeface="Arial"/>
+              </a:rPr>
+              <a:t>そして大いなる事柄がまだこの都市で成し遂げられるでしょう</a:t>
+            </a:r>
+          </a:p>
+        </p:txBody>
+      </p:sp>
     </p:spTree>
   </p:cSld>
   <p:clrMapOvr>
@@ -7187,6 +9182,76 @@
           </a:p>
         </p:txBody>
       </p:sp>
+      <p:sp>
+        <p:nvSpPr>
+          <p:cNvPr id="4" name="TextBox 3"/>
+          <p:cNvSpPr txBox="1"/>
+          <p:nvPr/>
+        </p:nvSpPr>
+        <p:spPr>
+          <a:xfrm>
+            <a:off x="640080" y="4128516"/>
+            <a:ext cx="10911535" cy="310896"/>
+          </a:xfrm>
+          <a:prstGeom prst="rect">
+            <a:avLst/>
+          </a:prstGeom>
+          <a:noFill/>
+        </p:spPr>
+        <p:txBody>
+          <a:bodyPr wrap="square">
+            <a:spAutoFit/>
+          </a:bodyPr>
+          <a:lstStyle/>
+          <a:p>
+            <a:pPr algn="ctr"/>
+            <a:r>
+              <a:rPr sz="2000" b="0" i="0">
+                <a:solidFill>
+                  <a:srgbClr val="828282"/>
+                </a:solidFill>
+                <a:latin typeface="Arial"/>
+              </a:rPr>
+              <a:t>私たちの神のようなお方はいません</a:t>
+            </a:r>
+          </a:p>
+        </p:txBody>
+      </p:sp>
+      <p:sp>
+        <p:nvSpPr>
+          <p:cNvPr id="5" name="TextBox 4"/>
+          <p:cNvSpPr txBox="1"/>
+          <p:nvPr/>
+        </p:nvSpPr>
+        <p:spPr>
+          <a:xfrm>
+            <a:off x="640080" y="4494276"/>
+            <a:ext cx="10911535" cy="310896"/>
+          </a:xfrm>
+          <a:prstGeom prst="rect">
+            <a:avLst/>
+          </a:prstGeom>
+          <a:noFill/>
+        </p:spPr>
+        <p:txBody>
+          <a:bodyPr wrap="square">
+            <a:spAutoFit/>
+          </a:bodyPr>
+          <a:lstStyle/>
+          <a:p>
+            <a:pPr algn="ctr"/>
+            <a:r>
+              <a:rPr sz="2000" b="0" i="0">
+                <a:solidFill>
+                  <a:srgbClr val="828282"/>
+                </a:solidFill>
+                <a:latin typeface="Arial"/>
+              </a:rPr>
+              <a:t>さらに大いなる事柄がまだ来ようとしています</a:t>
+            </a:r>
+          </a:p>
+        </p:txBody>
+      </p:sp>
     </p:spTree>
   </p:cSld>
   <p:clrMapOvr>
@@ -7283,6 +9348,76 @@
           </a:p>
         </p:txBody>
       </p:sp>
+      <p:sp>
+        <p:nvSpPr>
+          <p:cNvPr id="4" name="TextBox 3"/>
+          <p:cNvSpPr txBox="1"/>
+          <p:nvPr/>
+        </p:nvSpPr>
+        <p:spPr>
+          <a:xfrm>
+            <a:off x="640080" y="4128516"/>
+            <a:ext cx="10911535" cy="310896"/>
+          </a:xfrm>
+          <a:prstGeom prst="rect">
+            <a:avLst/>
+          </a:prstGeom>
+          <a:noFill/>
+        </p:spPr>
+        <p:txBody>
+          <a:bodyPr wrap="square">
+            <a:spAutoFit/>
+          </a:bodyPr>
+          <a:lstStyle/>
+          <a:p>
+            <a:pPr algn="ctr"/>
+            <a:r>
+              <a:rPr sz="2000" b="0" i="0">
+                <a:solidFill>
+                  <a:srgbClr val="828282"/>
+                </a:solidFill>
+                <a:latin typeface="Arial"/>
+              </a:rPr>
+              <a:t>そして大いなる事柄がまだこの都市で成し遂げられるでしょう</a:t>
+            </a:r>
+          </a:p>
+        </p:txBody>
+      </p:sp>
+      <p:sp>
+        <p:nvSpPr>
+          <p:cNvPr id="5" name="TextBox 4"/>
+          <p:cNvSpPr txBox="1"/>
+          <p:nvPr/>
+        </p:nvSpPr>
+        <p:spPr>
+          <a:xfrm>
+            <a:off x="640080" y="4494276"/>
+            <a:ext cx="10911535" cy="310896"/>
+          </a:xfrm>
+          <a:prstGeom prst="rect">
+            <a:avLst/>
+          </a:prstGeom>
+          <a:noFill/>
+        </p:spPr>
+        <p:txBody>
+          <a:bodyPr wrap="square">
+            <a:spAutoFit/>
+          </a:bodyPr>
+          <a:lstStyle/>
+          <a:p>
+            <a:pPr algn="ctr"/>
+            <a:r>
+              <a:rPr sz="2000" b="0" i="0">
+                <a:solidFill>
+                  <a:srgbClr val="828282"/>
+                </a:solidFill>
+                <a:latin typeface="Arial"/>
+              </a:rPr>
+              <a:t>この都市で</a:t>
+            </a:r>
+          </a:p>
+        </p:txBody>
+      </p:sp>
     </p:spTree>
   </p:cSld>
   <p:clrMapOvr>
@@ -7379,6 +9514,76 @@
           </a:p>
         </p:txBody>
       </p:sp>
+      <p:sp>
+        <p:nvSpPr>
+          <p:cNvPr id="4" name="TextBox 3"/>
+          <p:cNvSpPr txBox="1"/>
+          <p:nvPr/>
+        </p:nvSpPr>
+        <p:spPr>
+          <a:xfrm>
+            <a:off x="640080" y="4128516"/>
+            <a:ext cx="10911535" cy="310896"/>
+          </a:xfrm>
+          <a:prstGeom prst="rect">
+            <a:avLst/>
+          </a:prstGeom>
+          <a:noFill/>
+        </p:spPr>
+        <p:txBody>
+          <a:bodyPr wrap="square">
+            <a:spAutoFit/>
+          </a:bodyPr>
+          <a:lstStyle/>
+          <a:p>
+            <a:pPr algn="ctr"/>
+            <a:r>
+              <a:rPr sz="2000" b="0" i="0">
+                <a:solidFill>
+                  <a:srgbClr val="828282"/>
+                </a:solidFill>
+                <a:latin typeface="Arial"/>
+              </a:rPr>
+              <a:t>あなたはこの都市の神です</a:t>
+            </a:r>
+          </a:p>
+        </p:txBody>
+      </p:sp>
+      <p:sp>
+        <p:nvSpPr>
+          <p:cNvPr id="5" name="TextBox 4"/>
+          <p:cNvSpPr txBox="1"/>
+          <p:nvPr/>
+        </p:nvSpPr>
+        <p:spPr>
+          <a:xfrm>
+            <a:off x="640080" y="4494276"/>
+            <a:ext cx="10911535" cy="310896"/>
+          </a:xfrm>
+          <a:prstGeom prst="rect">
+            <a:avLst/>
+          </a:prstGeom>
+          <a:noFill/>
+        </p:spPr>
+        <p:txBody>
+          <a:bodyPr wrap="square">
+            <a:spAutoFit/>
+          </a:bodyPr>
+          <a:lstStyle/>
+          <a:p>
+            <a:pPr algn="ctr"/>
+            <a:r>
+              <a:rPr sz="2000" b="0" i="0">
+                <a:solidFill>
+                  <a:srgbClr val="828282"/>
+                </a:solidFill>
+                <a:latin typeface="Arial"/>
+              </a:rPr>
+              <a:t>あなたはこの民の王です</a:t>
+            </a:r>
+          </a:p>
+        </p:txBody>
+      </p:sp>
     </p:spTree>
   </p:cSld>
   <p:clrMapOvr>
@@ -7475,6 +9680,76 @@
           </a:p>
         </p:txBody>
       </p:sp>
+      <p:sp>
+        <p:nvSpPr>
+          <p:cNvPr id="4" name="TextBox 3"/>
+          <p:cNvSpPr txBox="1"/>
+          <p:nvPr/>
+        </p:nvSpPr>
+        <p:spPr>
+          <a:xfrm>
+            <a:off x="640080" y="4128516"/>
+            <a:ext cx="10911535" cy="310896"/>
+          </a:xfrm>
+          <a:prstGeom prst="rect">
+            <a:avLst/>
+          </a:prstGeom>
+          <a:noFill/>
+        </p:spPr>
+        <p:txBody>
+          <a:bodyPr wrap="square">
+            <a:spAutoFit/>
+          </a:bodyPr>
+          <a:lstStyle/>
+          <a:p>
+            <a:pPr algn="ctr"/>
+            <a:r>
+              <a:rPr sz="2000" b="0" i="0">
+                <a:solidFill>
+                  <a:srgbClr val="828282"/>
+                </a:solidFill>
+                <a:latin typeface="Arial"/>
+              </a:rPr>
+              <a:t>あなたは不安な者たちの平和です</a:t>
+            </a:r>
+          </a:p>
+        </p:txBody>
+      </p:sp>
+      <p:sp>
+        <p:nvSpPr>
+          <p:cNvPr id="5" name="TextBox 4"/>
+          <p:cNvSpPr txBox="1"/>
+          <p:nvPr/>
+        </p:nvSpPr>
+        <p:spPr>
+          <a:xfrm>
+            <a:off x="640080" y="4494276"/>
+            <a:ext cx="10911535" cy="310896"/>
+          </a:xfrm>
+          <a:prstGeom prst="rect">
+            <a:avLst/>
+          </a:prstGeom>
+          <a:noFill/>
+        </p:spPr>
+        <p:txBody>
+          <a:bodyPr wrap="square">
+            <a:spAutoFit/>
+          </a:bodyPr>
+          <a:lstStyle/>
+          <a:p>
+            <a:pPr algn="ctr"/>
+            <a:r>
+              <a:rPr sz="2000" b="0" i="0">
+                <a:solidFill>
+                  <a:srgbClr val="828282"/>
+                </a:solidFill>
+                <a:latin typeface="Arial"/>
+              </a:rPr>
+              <a:t>あなたです</a:t>
+            </a:r>
+          </a:p>
+        </p:txBody>
+      </p:sp>
     </p:spTree>
   </p:cSld>
   <p:clrMapOvr>
@@ -7571,6 +9846,76 @@
           </a:p>
         </p:txBody>
       </p:sp>
+      <p:sp>
+        <p:nvSpPr>
+          <p:cNvPr id="4" name="TextBox 3"/>
+          <p:cNvSpPr txBox="1"/>
+          <p:nvPr/>
+        </p:nvSpPr>
+        <p:spPr>
+          <a:xfrm>
+            <a:off x="640080" y="4128516"/>
+            <a:ext cx="10911535" cy="310896"/>
+          </a:xfrm>
+          <a:prstGeom prst="rect">
+            <a:avLst/>
+          </a:prstGeom>
+          <a:noFill/>
+        </p:spPr>
+        <p:txBody>
+          <a:bodyPr wrap="square">
+            <a:spAutoFit/>
+          </a:bodyPr>
+          <a:lstStyle/>
+          <a:p>
+            <a:pPr algn="ctr"/>
+            <a:r>
+              <a:rPr sz="2000" b="0" i="0">
+                <a:solidFill>
+                  <a:srgbClr val="828282"/>
+                </a:solidFill>
+                <a:latin typeface="Arial"/>
+              </a:rPr>
+              <a:t>私たちの神のようなお方はいません</a:t>
+            </a:r>
+          </a:p>
+        </p:txBody>
+      </p:sp>
+      <p:sp>
+        <p:nvSpPr>
+          <p:cNvPr id="5" name="TextBox 4"/>
+          <p:cNvSpPr txBox="1"/>
+          <p:nvPr/>
+        </p:nvSpPr>
+        <p:spPr>
+          <a:xfrm>
+            <a:off x="640080" y="4494276"/>
+            <a:ext cx="10911535" cy="310896"/>
+          </a:xfrm>
+          <a:prstGeom prst="rect">
+            <a:avLst/>
+          </a:prstGeom>
+          <a:noFill/>
+        </p:spPr>
+        <p:txBody>
+          <a:bodyPr wrap="square">
+            <a:spAutoFit/>
+          </a:bodyPr>
+          <a:lstStyle/>
+          <a:p>
+            <a:pPr algn="ctr"/>
+            <a:r>
+              <a:rPr sz="2000" b="0" i="0">
+                <a:solidFill>
+                  <a:srgbClr val="828282"/>
+                </a:solidFill>
+                <a:latin typeface="Arial"/>
+              </a:rPr>
+              <a:t>私たちの神のようなお方はいません</a:t>
+            </a:r>
+          </a:p>
+        </p:txBody>
+      </p:sp>
     </p:spTree>
   </p:cSld>
   <p:clrMapOvr>
@@ -7667,6 +10012,76 @@
           </a:p>
         </p:txBody>
       </p:sp>
+      <p:sp>
+        <p:nvSpPr>
+          <p:cNvPr id="4" name="TextBox 3"/>
+          <p:cNvSpPr txBox="1"/>
+          <p:nvPr/>
+        </p:nvSpPr>
+        <p:spPr>
+          <a:xfrm>
+            <a:off x="640080" y="4128516"/>
+            <a:ext cx="10911535" cy="310896"/>
+          </a:xfrm>
+          <a:prstGeom prst="rect">
+            <a:avLst/>
+          </a:prstGeom>
+          <a:noFill/>
+        </p:spPr>
+        <p:txBody>
+          <a:bodyPr wrap="square">
+            <a:spAutoFit/>
+          </a:bodyPr>
+          <a:lstStyle/>
+          <a:p>
+            <a:pPr algn="ctr"/>
+            <a:r>
+              <a:rPr sz="2000" b="0" i="0">
+                <a:solidFill>
+                  <a:srgbClr val="828282"/>
+                </a:solidFill>
+                <a:latin typeface="Arial"/>
+              </a:rPr>
+              <a:t>さらに大いなる事柄がまだ来ようとしています</a:t>
+            </a:r>
+          </a:p>
+        </p:txBody>
+      </p:sp>
+      <p:sp>
+        <p:nvSpPr>
+          <p:cNvPr id="5" name="TextBox 4"/>
+          <p:cNvSpPr txBox="1"/>
+          <p:nvPr/>
+        </p:nvSpPr>
+        <p:spPr>
+          <a:xfrm>
+            <a:off x="640080" y="4494276"/>
+            <a:ext cx="10911535" cy="310896"/>
+          </a:xfrm>
+          <a:prstGeom prst="rect">
+            <a:avLst/>
+          </a:prstGeom>
+          <a:noFill/>
+        </p:spPr>
+        <p:txBody>
+          <a:bodyPr wrap="square">
+            <a:spAutoFit/>
+          </a:bodyPr>
+          <a:lstStyle/>
+          <a:p>
+            <a:pPr algn="ctr"/>
+            <a:r>
+              <a:rPr sz="2000" b="0" i="0">
+                <a:solidFill>
+                  <a:srgbClr val="828282"/>
+                </a:solidFill>
+                <a:latin typeface="Arial"/>
+              </a:rPr>
+              <a:t>そして大いなる事柄がまだこの都市で成し遂げられるでしょう</a:t>
+            </a:r>
+          </a:p>
+        </p:txBody>
+      </p:sp>
     </p:spTree>
   </p:cSld>
   <p:clrMapOvr>
@@ -7763,6 +10178,76 @@
           </a:p>
         </p:txBody>
       </p:sp>
+      <p:sp>
+        <p:nvSpPr>
+          <p:cNvPr id="4" name="TextBox 3"/>
+          <p:cNvSpPr txBox="1"/>
+          <p:nvPr/>
+        </p:nvSpPr>
+        <p:spPr>
+          <a:xfrm>
+            <a:off x="640080" y="4128516"/>
+            <a:ext cx="10911535" cy="310896"/>
+          </a:xfrm>
+          <a:prstGeom prst="rect">
+            <a:avLst/>
+          </a:prstGeom>
+          <a:noFill/>
+        </p:spPr>
+        <p:txBody>
+          <a:bodyPr wrap="square">
+            <a:spAutoFit/>
+          </a:bodyPr>
+          <a:lstStyle/>
+          <a:p>
+            <a:pPr algn="ctr"/>
+            <a:r>
+              <a:rPr sz="2000" b="0" i="0">
+                <a:solidFill>
+                  <a:srgbClr val="828282"/>
+                </a:solidFill>
+                <a:latin typeface="Arial"/>
+              </a:rPr>
+              <a:t>この都市で</a:t>
+            </a:r>
+          </a:p>
+        </p:txBody>
+      </p:sp>
+      <p:sp>
+        <p:nvSpPr>
+          <p:cNvPr id="5" name="TextBox 4"/>
+          <p:cNvSpPr txBox="1"/>
+          <p:nvPr/>
+        </p:nvSpPr>
+        <p:spPr>
+          <a:xfrm>
+            <a:off x="640080" y="4494276"/>
+            <a:ext cx="10911535" cy="310896"/>
+          </a:xfrm>
+          <a:prstGeom prst="rect">
+            <a:avLst/>
+          </a:prstGeom>
+          <a:noFill/>
+        </p:spPr>
+        <p:txBody>
+          <a:bodyPr wrap="square">
+            <a:spAutoFit/>
+          </a:bodyPr>
+          <a:lstStyle/>
+          <a:p>
+            <a:pPr algn="ctr"/>
+            <a:r>
+              <a:rPr sz="2000" b="0" i="0">
+                <a:solidFill>
+                  <a:srgbClr val="828282"/>
+                </a:solidFill>
+                <a:latin typeface="Arial"/>
+              </a:rPr>
+              <a:t>私たちは信じます！</a:t>
+            </a:r>
+          </a:p>
+        </p:txBody>
+      </p:sp>
     </p:spTree>
   </p:cSld>
   <p:clrMapOvr>
@@ -7859,6 +10344,76 @@
           </a:p>
         </p:txBody>
       </p:sp>
+      <p:sp>
+        <p:nvSpPr>
+          <p:cNvPr id="4" name="TextBox 3"/>
+          <p:cNvSpPr txBox="1"/>
+          <p:nvPr/>
+        </p:nvSpPr>
+        <p:spPr>
+          <a:xfrm>
+            <a:off x="640080" y="4128516"/>
+            <a:ext cx="10911535" cy="310896"/>
+          </a:xfrm>
+          <a:prstGeom prst="rect">
+            <a:avLst/>
+          </a:prstGeom>
+          <a:noFill/>
+        </p:spPr>
+        <p:txBody>
+          <a:bodyPr wrap="square">
+            <a:spAutoFit/>
+          </a:bodyPr>
+          <a:lstStyle/>
+          <a:p>
+            <a:pPr algn="ctr"/>
+            <a:r>
+              <a:rPr sz="2000" b="0" i="0">
+                <a:solidFill>
+                  <a:srgbClr val="828282"/>
+                </a:solidFill>
+                <a:latin typeface="Arial"/>
+              </a:rPr>
+              <a:t>私たちはあなたを信じます、神よ</a:t>
+            </a:r>
+          </a:p>
+        </p:txBody>
+      </p:sp>
+      <p:sp>
+        <p:nvSpPr>
+          <p:cNvPr id="5" name="TextBox 4"/>
+          <p:cNvSpPr txBox="1"/>
+          <p:nvPr/>
+        </p:nvSpPr>
+        <p:spPr>
+          <a:xfrm>
+            <a:off x="640080" y="4494276"/>
+            <a:ext cx="10911535" cy="310896"/>
+          </a:xfrm>
+          <a:prstGeom prst="rect">
+            <a:avLst/>
+          </a:prstGeom>
+          <a:noFill/>
+        </p:spPr>
+        <p:txBody>
+          <a:bodyPr wrap="square">
+            <a:spAutoFit/>
+          </a:bodyPr>
+          <a:lstStyle/>
+          <a:p>
+            <a:pPr algn="ctr"/>
+            <a:r>
+              <a:rPr sz="2000" b="0" i="0">
+                <a:solidFill>
+                  <a:srgbClr val="828282"/>
+                </a:solidFill>
+                <a:latin typeface="Arial"/>
+              </a:rPr>
+              <a:t>さらに大いなる事柄がまだ来ようとしています</a:t>
+            </a:r>
+          </a:p>
+        </p:txBody>
+      </p:sp>
     </p:spTree>
   </p:cSld>
   <p:clrMapOvr>
@@ -7920,6 +10475,41 @@
           </a:p>
         </p:txBody>
       </p:sp>
+      <p:sp>
+        <p:nvSpPr>
+          <p:cNvPr id="3" name="TextBox 2"/>
+          <p:cNvSpPr txBox="1"/>
+          <p:nvPr/>
+        </p:nvSpPr>
+        <p:spPr>
+          <a:xfrm>
+            <a:off x="640080" y="3845052"/>
+            <a:ext cx="10911535" cy="310896"/>
+          </a:xfrm>
+          <a:prstGeom prst="rect">
+            <a:avLst/>
+          </a:prstGeom>
+          <a:noFill/>
+        </p:spPr>
+        <p:txBody>
+          <a:bodyPr wrap="square">
+            <a:spAutoFit/>
+          </a:bodyPr>
+          <a:lstStyle/>
+          <a:p>
+            <a:pPr algn="ctr"/>
+            <a:r>
+              <a:rPr sz="2000" b="0" i="0">
+                <a:solidFill>
+                  <a:srgbClr val="828282"/>
+                </a:solidFill>
+                <a:latin typeface="Arial"/>
+              </a:rPr>
+              <a:t>そして大いなる事柄がまだこの都市で成し遂げられるでしょう</a:t>
+            </a:r>
+          </a:p>
+        </p:txBody>
+      </p:sp>
     </p:spTree>
   </p:cSld>
   <p:clrMapOvr>
@@ -8016,6 +10606,76 @@
           </a:p>
         </p:txBody>
       </p:sp>
+      <p:sp>
+        <p:nvSpPr>
+          <p:cNvPr id="4" name="TextBox 3"/>
+          <p:cNvSpPr txBox="1"/>
+          <p:nvPr/>
+        </p:nvSpPr>
+        <p:spPr>
+          <a:xfrm>
+            <a:off x="640080" y="4128516"/>
+            <a:ext cx="10911535" cy="310896"/>
+          </a:xfrm>
+          <a:prstGeom prst="rect">
+            <a:avLst/>
+          </a:prstGeom>
+          <a:noFill/>
+        </p:spPr>
+        <p:txBody>
+          <a:bodyPr wrap="square">
+            <a:spAutoFit/>
+          </a:bodyPr>
+          <a:lstStyle/>
+          <a:p>
+            <a:pPr algn="ctr"/>
+            <a:r>
+              <a:rPr sz="2000" b="0" i="0">
+                <a:solidFill>
+                  <a:srgbClr val="828282"/>
+                </a:solidFill>
+                <a:latin typeface="Arial"/>
+              </a:rPr>
+              <a:t>あなたです</a:t>
+            </a:r>
+          </a:p>
+        </p:txBody>
+      </p:sp>
+      <p:sp>
+        <p:nvSpPr>
+          <p:cNvPr id="5" name="TextBox 4"/>
+          <p:cNvSpPr txBox="1"/>
+          <p:nvPr/>
+        </p:nvSpPr>
+        <p:spPr>
+          <a:xfrm>
+            <a:off x="640080" y="4494276"/>
+            <a:ext cx="10911535" cy="310896"/>
+          </a:xfrm>
+          <a:prstGeom prst="rect">
+            <a:avLst/>
+          </a:prstGeom>
+          <a:noFill/>
+        </p:spPr>
+        <p:txBody>
+          <a:bodyPr wrap="square">
+            <a:spAutoFit/>
+          </a:bodyPr>
+          <a:lstStyle/>
+          <a:p>
+            <a:pPr algn="ctr"/>
+            <a:r>
+              <a:rPr sz="2000" b="0" i="0">
+                <a:solidFill>
+                  <a:srgbClr val="828282"/>
+                </a:solidFill>
+                <a:latin typeface="Arial"/>
+              </a:rPr>
+              <a:t>私たちの神のようなお方はいません</a:t>
+            </a:r>
+          </a:p>
+        </p:txBody>
+      </p:sp>
     </p:spTree>
   </p:cSld>
   <p:clrMapOvr>
@@ -8112,6 +10772,76 @@
           </a:p>
         </p:txBody>
       </p:sp>
+      <p:sp>
+        <p:nvSpPr>
+          <p:cNvPr id="4" name="TextBox 3"/>
+          <p:cNvSpPr txBox="1"/>
+          <p:nvPr/>
+        </p:nvSpPr>
+        <p:spPr>
+          <a:xfrm>
+            <a:off x="640080" y="4128516"/>
+            <a:ext cx="10911535" cy="310896"/>
+          </a:xfrm>
+          <a:prstGeom prst="rect">
+            <a:avLst/>
+          </a:prstGeom>
+          <a:noFill/>
+        </p:spPr>
+        <p:txBody>
+          <a:bodyPr wrap="square">
+            <a:spAutoFit/>
+          </a:bodyPr>
+          <a:lstStyle/>
+          <a:p>
+            <a:pPr algn="ctr"/>
+            <a:r>
+              <a:rPr sz="2000" b="0" i="0">
+                <a:solidFill>
+                  <a:srgbClr val="828282"/>
+                </a:solidFill>
+                <a:latin typeface="Arial"/>
+              </a:rPr>
+              <a:t>私たちの神のようなお方はいません</a:t>
+            </a:r>
+          </a:p>
+        </p:txBody>
+      </p:sp>
+      <p:sp>
+        <p:nvSpPr>
+          <p:cNvPr id="5" name="TextBox 4"/>
+          <p:cNvSpPr txBox="1"/>
+          <p:nvPr/>
+        </p:nvSpPr>
+        <p:spPr>
+          <a:xfrm>
+            <a:off x="640080" y="4494276"/>
+            <a:ext cx="10911535" cy="310896"/>
+          </a:xfrm>
+          <a:prstGeom prst="rect">
+            <a:avLst/>
+          </a:prstGeom>
+          <a:noFill/>
+        </p:spPr>
+        <p:txBody>
+          <a:bodyPr wrap="square">
+            <a:spAutoFit/>
+          </a:bodyPr>
+          <a:lstStyle/>
+          <a:p>
+            <a:pPr algn="ctr"/>
+            <a:r>
+              <a:rPr sz="2000" b="0" i="0">
+                <a:solidFill>
+                  <a:srgbClr val="828282"/>
+                </a:solidFill>
+                <a:latin typeface="Arial"/>
+              </a:rPr>
+              <a:t>さらに大いなる事柄がまだ来ようとしています</a:t>
+            </a:r>
+          </a:p>
+        </p:txBody>
+      </p:sp>
     </p:spTree>
   </p:cSld>
   <p:clrMapOvr>
@@ -8208,6 +10938,76 @@
           </a:p>
         </p:txBody>
       </p:sp>
+      <p:sp>
+        <p:nvSpPr>
+          <p:cNvPr id="4" name="TextBox 3"/>
+          <p:cNvSpPr txBox="1"/>
+          <p:nvPr/>
+        </p:nvSpPr>
+        <p:spPr>
+          <a:xfrm>
+            <a:off x="640080" y="4128516"/>
+            <a:ext cx="10911535" cy="310896"/>
+          </a:xfrm>
+          <a:prstGeom prst="rect">
+            <a:avLst/>
+          </a:prstGeom>
+          <a:noFill/>
+        </p:spPr>
+        <p:txBody>
+          <a:bodyPr wrap="square">
+            <a:spAutoFit/>
+          </a:bodyPr>
+          <a:lstStyle/>
+          <a:p>
+            <a:pPr algn="ctr"/>
+            <a:r>
+              <a:rPr sz="2000" b="0" i="0">
+                <a:solidFill>
+                  <a:srgbClr val="828282"/>
+                </a:solidFill>
+                <a:latin typeface="Arial"/>
+              </a:rPr>
+              <a:t>そして大いなる事柄がまだこの都市で成し遂げられるでしょう</a:t>
+            </a:r>
+          </a:p>
+        </p:txBody>
+      </p:sp>
+      <p:sp>
+        <p:nvSpPr>
+          <p:cNvPr id="5" name="TextBox 4"/>
+          <p:cNvSpPr txBox="1"/>
+          <p:nvPr/>
+        </p:nvSpPr>
+        <p:spPr>
+          <a:xfrm>
+            <a:off x="640080" y="4494276"/>
+            <a:ext cx="10911535" cy="310896"/>
+          </a:xfrm>
+          <a:prstGeom prst="rect">
+            <a:avLst/>
+          </a:prstGeom>
+          <a:noFill/>
+        </p:spPr>
+        <p:txBody>
+          <a:bodyPr wrap="square">
+            <a:spAutoFit/>
+          </a:bodyPr>
+          <a:lstStyle/>
+          <a:p>
+            <a:pPr algn="ctr"/>
+            <a:r>
+              <a:rPr sz="2000" b="0" i="0">
+                <a:solidFill>
+                  <a:srgbClr val="828282"/>
+                </a:solidFill>
+                <a:latin typeface="Arial"/>
+              </a:rPr>
+              <a:t>この都市で</a:t>
+            </a:r>
+          </a:p>
+        </p:txBody>
+      </p:sp>
     </p:spTree>
   </p:cSld>
   <p:clrMapOvr>
@@ -8304,6 +11104,76 @@
           </a:p>
         </p:txBody>
       </p:sp>
+      <p:sp>
+        <p:nvSpPr>
+          <p:cNvPr id="4" name="TextBox 3"/>
+          <p:cNvSpPr txBox="1"/>
+          <p:nvPr/>
+        </p:nvSpPr>
+        <p:spPr>
+          <a:xfrm>
+            <a:off x="640080" y="4128516"/>
+            <a:ext cx="10911535" cy="310896"/>
+          </a:xfrm>
+          <a:prstGeom prst="rect">
+            <a:avLst/>
+          </a:prstGeom>
+          <a:noFill/>
+        </p:spPr>
+        <p:txBody>
+          <a:bodyPr wrap="square">
+            <a:spAutoFit/>
+          </a:bodyPr>
+          <a:lstStyle/>
+          <a:p>
+            <a:pPr algn="ctr"/>
+            <a:r>
+              <a:rPr sz="2000" b="0" i="0">
+                <a:solidFill>
+                  <a:srgbClr val="828282"/>
+                </a:solidFill>
+                <a:latin typeface="Arial"/>
+              </a:rPr>
+              <a:t>あなたはこの都市の神です</a:t>
+            </a:r>
+          </a:p>
+        </p:txBody>
+      </p:sp>
+      <p:sp>
+        <p:nvSpPr>
+          <p:cNvPr id="5" name="TextBox 4"/>
+          <p:cNvSpPr txBox="1"/>
+          <p:nvPr/>
+        </p:nvSpPr>
+        <p:spPr>
+          <a:xfrm>
+            <a:off x="640080" y="4494276"/>
+            <a:ext cx="10911535" cy="310896"/>
+          </a:xfrm>
+          <a:prstGeom prst="rect">
+            <a:avLst/>
+          </a:prstGeom>
+          <a:noFill/>
+        </p:spPr>
+        <p:txBody>
+          <a:bodyPr wrap="square">
+            <a:spAutoFit/>
+          </a:bodyPr>
+          <a:lstStyle/>
+          <a:p>
+            <a:pPr algn="ctr"/>
+            <a:r>
+              <a:rPr sz="2000" b="0" i="0">
+                <a:solidFill>
+                  <a:srgbClr val="828282"/>
+                </a:solidFill>
+                <a:latin typeface="Arial"/>
+              </a:rPr>
+              <a:t>あなたはこの民の王です</a:t>
+            </a:r>
+          </a:p>
+        </p:txBody>
+      </p:sp>
     </p:spTree>
   </p:cSld>
   <p:clrMapOvr>
@@ -8400,6 +11270,76 @@
           </a:p>
         </p:txBody>
       </p:sp>
+      <p:sp>
+        <p:nvSpPr>
+          <p:cNvPr id="4" name="TextBox 3"/>
+          <p:cNvSpPr txBox="1"/>
+          <p:nvPr/>
+        </p:nvSpPr>
+        <p:spPr>
+          <a:xfrm>
+            <a:off x="640080" y="4128516"/>
+            <a:ext cx="10911535" cy="310896"/>
+          </a:xfrm>
+          <a:prstGeom prst="rect">
+            <a:avLst/>
+          </a:prstGeom>
+          <a:noFill/>
+        </p:spPr>
+        <p:txBody>
+          <a:bodyPr wrap="square">
+            <a:spAutoFit/>
+          </a:bodyPr>
+          <a:lstStyle/>
+          <a:p>
+            <a:pPr algn="ctr"/>
+            <a:r>
+              <a:rPr sz="2000" b="0" i="0">
+                <a:solidFill>
+                  <a:srgbClr val="828282"/>
+                </a:solidFill>
+                <a:latin typeface="Arial"/>
+              </a:rPr>
+              <a:t>あなたは不安な者たちの平和です</a:t>
+            </a:r>
+          </a:p>
+        </p:txBody>
+      </p:sp>
+      <p:sp>
+        <p:nvSpPr>
+          <p:cNvPr id="5" name="TextBox 4"/>
+          <p:cNvSpPr txBox="1"/>
+          <p:nvPr/>
+        </p:nvSpPr>
+        <p:spPr>
+          <a:xfrm>
+            <a:off x="640080" y="4494276"/>
+            <a:ext cx="10911535" cy="310896"/>
+          </a:xfrm>
+          <a:prstGeom prst="rect">
+            <a:avLst/>
+          </a:prstGeom>
+          <a:noFill/>
+        </p:spPr>
+        <p:txBody>
+          <a:bodyPr wrap="square">
+            <a:spAutoFit/>
+          </a:bodyPr>
+          <a:lstStyle/>
+          <a:p>
+            <a:pPr algn="ctr"/>
+            <a:r>
+              <a:rPr sz="2000" b="0" i="0">
+                <a:solidFill>
+                  <a:srgbClr val="828282"/>
+                </a:solidFill>
+                <a:latin typeface="Arial"/>
+              </a:rPr>
+              <a:t>あなたです</a:t>
+            </a:r>
+          </a:p>
+        </p:txBody>
+      </p:sp>
     </p:spTree>
   </p:cSld>
   <p:clrMapOvr>
@@ -8496,6 +11436,76 @@
           </a:p>
         </p:txBody>
       </p:sp>
+      <p:sp>
+        <p:nvSpPr>
+          <p:cNvPr id="4" name="TextBox 3"/>
+          <p:cNvSpPr txBox="1"/>
+          <p:nvPr/>
+        </p:nvSpPr>
+        <p:spPr>
+          <a:xfrm>
+            <a:off x="640080" y="4128516"/>
+            <a:ext cx="10911535" cy="310896"/>
+          </a:xfrm>
+          <a:prstGeom prst="rect">
+            <a:avLst/>
+          </a:prstGeom>
+          <a:noFill/>
+        </p:spPr>
+        <p:txBody>
+          <a:bodyPr wrap="square">
+            <a:spAutoFit/>
+          </a:bodyPr>
+          <a:lstStyle/>
+          <a:p>
+            <a:pPr algn="ctr"/>
+            <a:r>
+              <a:rPr sz="2000" b="0" i="0">
+                <a:solidFill>
+                  <a:srgbClr val="828282"/>
+                </a:solidFill>
+                <a:latin typeface="Arial"/>
+              </a:rPr>
+              <a:t>私たちの神のようなお方はいません</a:t>
+            </a:r>
+          </a:p>
+        </p:txBody>
+      </p:sp>
+      <p:sp>
+        <p:nvSpPr>
+          <p:cNvPr id="5" name="TextBox 4"/>
+          <p:cNvSpPr txBox="1"/>
+          <p:nvPr/>
+        </p:nvSpPr>
+        <p:spPr>
+          <a:xfrm>
+            <a:off x="640080" y="4494276"/>
+            <a:ext cx="10911535" cy="310896"/>
+          </a:xfrm>
+          <a:prstGeom prst="rect">
+            <a:avLst/>
+          </a:prstGeom>
+          <a:noFill/>
+        </p:spPr>
+        <p:txBody>
+          <a:bodyPr wrap="square">
+            <a:spAutoFit/>
+          </a:bodyPr>
+          <a:lstStyle/>
+          <a:p>
+            <a:pPr algn="ctr"/>
+            <a:r>
+              <a:rPr sz="2000" b="0" i="0">
+                <a:solidFill>
+                  <a:srgbClr val="828282"/>
+                </a:solidFill>
+                <a:latin typeface="Arial"/>
+              </a:rPr>
+              <a:t>私たちの神のようなお方はいません</a:t>
+            </a:r>
+          </a:p>
+        </p:txBody>
+      </p:sp>
     </p:spTree>
   </p:cSld>
   <p:clrMapOvr>
@@ -8592,6 +11602,76 @@
           </a:p>
         </p:txBody>
       </p:sp>
+      <p:sp>
+        <p:nvSpPr>
+          <p:cNvPr id="4" name="TextBox 3"/>
+          <p:cNvSpPr txBox="1"/>
+          <p:nvPr/>
+        </p:nvSpPr>
+        <p:spPr>
+          <a:xfrm>
+            <a:off x="640080" y="4128516"/>
+            <a:ext cx="10911535" cy="310896"/>
+          </a:xfrm>
+          <a:prstGeom prst="rect">
+            <a:avLst/>
+          </a:prstGeom>
+          <a:noFill/>
+        </p:spPr>
+        <p:txBody>
+          <a:bodyPr wrap="square">
+            <a:spAutoFit/>
+          </a:bodyPr>
+          <a:lstStyle/>
+          <a:p>
+            <a:pPr algn="ctr"/>
+            <a:r>
+              <a:rPr sz="2000" b="0" i="0">
+                <a:solidFill>
+                  <a:srgbClr val="828282"/>
+                </a:solidFill>
+                <a:latin typeface="Arial"/>
+              </a:rPr>
+              <a:t>さらに大いなる事柄がまだ来ようとしています</a:t>
+            </a:r>
+          </a:p>
+        </p:txBody>
+      </p:sp>
+      <p:sp>
+        <p:nvSpPr>
+          <p:cNvPr id="5" name="TextBox 4"/>
+          <p:cNvSpPr txBox="1"/>
+          <p:nvPr/>
+        </p:nvSpPr>
+        <p:spPr>
+          <a:xfrm>
+            <a:off x="640080" y="4494276"/>
+            <a:ext cx="10911535" cy="310896"/>
+          </a:xfrm>
+          <a:prstGeom prst="rect">
+            <a:avLst/>
+          </a:prstGeom>
+          <a:noFill/>
+        </p:spPr>
+        <p:txBody>
+          <a:bodyPr wrap="square">
+            <a:spAutoFit/>
+          </a:bodyPr>
+          <a:lstStyle/>
+          <a:p>
+            <a:pPr algn="ctr"/>
+            <a:r>
+              <a:rPr sz="2000" b="0" i="0">
+                <a:solidFill>
+                  <a:srgbClr val="828282"/>
+                </a:solidFill>
+                <a:latin typeface="Arial"/>
+              </a:rPr>
+              <a:t>そして大いなる事柄がまだこの都市で成し遂げられるでしょう</a:t>
+            </a:r>
+          </a:p>
+        </p:txBody>
+      </p:sp>
     </p:spTree>
   </p:cSld>
   <p:clrMapOvr>
@@ -8688,6 +11768,76 @@
           </a:p>
         </p:txBody>
       </p:sp>
+      <p:sp>
+        <p:nvSpPr>
+          <p:cNvPr id="4" name="TextBox 3"/>
+          <p:cNvSpPr txBox="1"/>
+          <p:nvPr/>
+        </p:nvSpPr>
+        <p:spPr>
+          <a:xfrm>
+            <a:off x="640080" y="4128516"/>
+            <a:ext cx="10911535" cy="310896"/>
+          </a:xfrm>
+          <a:prstGeom prst="rect">
+            <a:avLst/>
+          </a:prstGeom>
+          <a:noFill/>
+        </p:spPr>
+        <p:txBody>
+          <a:bodyPr wrap="square">
+            <a:spAutoFit/>
+          </a:bodyPr>
+          <a:lstStyle/>
+          <a:p>
+            <a:pPr algn="ctr"/>
+            <a:r>
+              <a:rPr sz="2000" b="0" i="0">
+                <a:solidFill>
+                  <a:srgbClr val="828282"/>
+                </a:solidFill>
+                <a:latin typeface="Arial"/>
+              </a:rPr>
+              <a:t>この都市で</a:t>
+            </a:r>
+          </a:p>
+        </p:txBody>
+      </p:sp>
+      <p:sp>
+        <p:nvSpPr>
+          <p:cNvPr id="5" name="TextBox 4"/>
+          <p:cNvSpPr txBox="1"/>
+          <p:nvPr/>
+        </p:nvSpPr>
+        <p:spPr>
+          <a:xfrm>
+            <a:off x="640080" y="4494276"/>
+            <a:ext cx="10911535" cy="310896"/>
+          </a:xfrm>
+          <a:prstGeom prst="rect">
+            <a:avLst/>
+          </a:prstGeom>
+          <a:noFill/>
+        </p:spPr>
+        <p:txBody>
+          <a:bodyPr wrap="square">
+            <a:spAutoFit/>
+          </a:bodyPr>
+          <a:lstStyle/>
+          <a:p>
+            <a:pPr algn="ctr"/>
+            <a:r>
+              <a:rPr sz="2000" b="0" i="0">
+                <a:solidFill>
+                  <a:srgbClr val="828282"/>
+                </a:solidFill>
+                <a:latin typeface="Arial"/>
+              </a:rPr>
+              <a:t>私たちは信じます！</a:t>
+            </a:r>
+          </a:p>
+        </p:txBody>
+      </p:sp>
     </p:spTree>
   </p:cSld>
   <p:clrMapOvr>
@@ -8784,6 +11934,76 @@
           </a:p>
         </p:txBody>
       </p:sp>
+      <p:sp>
+        <p:nvSpPr>
+          <p:cNvPr id="4" name="TextBox 3"/>
+          <p:cNvSpPr txBox="1"/>
+          <p:nvPr/>
+        </p:nvSpPr>
+        <p:spPr>
+          <a:xfrm>
+            <a:off x="640080" y="4128516"/>
+            <a:ext cx="10911535" cy="310896"/>
+          </a:xfrm>
+          <a:prstGeom prst="rect">
+            <a:avLst/>
+          </a:prstGeom>
+          <a:noFill/>
+        </p:spPr>
+        <p:txBody>
+          <a:bodyPr wrap="square">
+            <a:spAutoFit/>
+          </a:bodyPr>
+          <a:lstStyle/>
+          <a:p>
+            <a:pPr algn="ctr"/>
+            <a:r>
+              <a:rPr sz="2000" b="0" i="0">
+                <a:solidFill>
+                  <a:srgbClr val="828282"/>
+                </a:solidFill>
+                <a:latin typeface="Arial"/>
+              </a:rPr>
+              <a:t>私たちはあなたを信じます、神よ</a:t>
+            </a:r>
+          </a:p>
+        </p:txBody>
+      </p:sp>
+      <p:sp>
+        <p:nvSpPr>
+          <p:cNvPr id="5" name="TextBox 4"/>
+          <p:cNvSpPr txBox="1"/>
+          <p:nvPr/>
+        </p:nvSpPr>
+        <p:spPr>
+          <a:xfrm>
+            <a:off x="640080" y="4494276"/>
+            <a:ext cx="10911535" cy="310896"/>
+          </a:xfrm>
+          <a:prstGeom prst="rect">
+            <a:avLst/>
+          </a:prstGeom>
+          <a:noFill/>
+        </p:spPr>
+        <p:txBody>
+          <a:bodyPr wrap="square">
+            <a:spAutoFit/>
+          </a:bodyPr>
+          <a:lstStyle/>
+          <a:p>
+            <a:pPr algn="ctr"/>
+            <a:r>
+              <a:rPr sz="2000" b="0" i="0">
+                <a:solidFill>
+                  <a:srgbClr val="828282"/>
+                </a:solidFill>
+                <a:latin typeface="Arial"/>
+              </a:rPr>
+              <a:t>さらに大いなる事柄がまだ来ようとしています</a:t>
+            </a:r>
+          </a:p>
+        </p:txBody>
+      </p:sp>
     </p:spTree>
   </p:cSld>
   <p:clrMapOvr>
@@ -8845,6 +12065,41 @@
           </a:p>
         </p:txBody>
       </p:sp>
+      <p:sp>
+        <p:nvSpPr>
+          <p:cNvPr id="3" name="TextBox 2"/>
+          <p:cNvSpPr txBox="1"/>
+          <p:nvPr/>
+        </p:nvSpPr>
+        <p:spPr>
+          <a:xfrm>
+            <a:off x="640080" y="3845052"/>
+            <a:ext cx="10911535" cy="310896"/>
+          </a:xfrm>
+          <a:prstGeom prst="rect">
+            <a:avLst/>
+          </a:prstGeom>
+          <a:noFill/>
+        </p:spPr>
+        <p:txBody>
+          <a:bodyPr wrap="square">
+            <a:spAutoFit/>
+          </a:bodyPr>
+          <a:lstStyle/>
+          <a:p>
+            <a:pPr algn="ctr"/>
+            <a:r>
+              <a:rPr sz="2000" b="0" i="0">
+                <a:solidFill>
+                  <a:srgbClr val="828282"/>
+                </a:solidFill>
+                <a:latin typeface="Arial"/>
+              </a:rPr>
+              <a:t>そして大いなる事柄がまだこの都市で成し遂げられるでしょう</a:t>
+            </a:r>
+          </a:p>
+        </p:txBody>
+      </p:sp>
     </p:spTree>
   </p:cSld>
   <p:clrMapOvr>
@@ -8941,6 +12196,76 @@
           </a:p>
         </p:txBody>
       </p:sp>
+      <p:sp>
+        <p:nvSpPr>
+          <p:cNvPr id="4" name="TextBox 3"/>
+          <p:cNvSpPr txBox="1"/>
+          <p:nvPr/>
+        </p:nvSpPr>
+        <p:spPr>
+          <a:xfrm>
+            <a:off x="640080" y="4128516"/>
+            <a:ext cx="10911535" cy="310896"/>
+          </a:xfrm>
+          <a:prstGeom prst="rect">
+            <a:avLst/>
+          </a:prstGeom>
+          <a:noFill/>
+        </p:spPr>
+        <p:txBody>
+          <a:bodyPr wrap="square">
+            <a:spAutoFit/>
+          </a:bodyPr>
+          <a:lstStyle/>
+          <a:p>
+            <a:pPr algn="ctr"/>
+            <a:r>
+              <a:rPr sz="2000" b="0" i="0">
+                <a:solidFill>
+                  <a:srgbClr val="828282"/>
+                </a:solidFill>
+                <a:latin typeface="Arial"/>
+              </a:rPr>
+              <a:t>私たちの神のようなお方はいません</a:t>
+            </a:r>
+          </a:p>
+        </p:txBody>
+      </p:sp>
+      <p:sp>
+        <p:nvSpPr>
+          <p:cNvPr id="5" name="TextBox 4"/>
+          <p:cNvSpPr txBox="1"/>
+          <p:nvPr/>
+        </p:nvSpPr>
+        <p:spPr>
+          <a:xfrm>
+            <a:off x="640080" y="4494276"/>
+            <a:ext cx="10911535" cy="310896"/>
+          </a:xfrm>
+          <a:prstGeom prst="rect">
+            <a:avLst/>
+          </a:prstGeom>
+          <a:noFill/>
+        </p:spPr>
+        <p:txBody>
+          <a:bodyPr wrap="square">
+            <a:spAutoFit/>
+          </a:bodyPr>
+          <a:lstStyle/>
+          <a:p>
+            <a:pPr algn="ctr"/>
+            <a:r>
+              <a:rPr sz="2000" b="0" i="0">
+                <a:solidFill>
+                  <a:srgbClr val="828282"/>
+                </a:solidFill>
+                <a:latin typeface="Arial"/>
+              </a:rPr>
+              <a:t>さらに大いなる事柄がまだ来ようとしています</a:t>
+            </a:r>
+          </a:p>
+        </p:txBody>
+      </p:sp>
     </p:spTree>
   </p:cSld>
   <p:clrMapOvr>
@@ -9037,6 +12362,76 @@
           </a:p>
         </p:txBody>
       </p:sp>
+      <p:sp>
+        <p:nvSpPr>
+          <p:cNvPr id="4" name="TextBox 3"/>
+          <p:cNvSpPr txBox="1"/>
+          <p:nvPr/>
+        </p:nvSpPr>
+        <p:spPr>
+          <a:xfrm>
+            <a:off x="640080" y="4128516"/>
+            <a:ext cx="10911535" cy="310896"/>
+          </a:xfrm>
+          <a:prstGeom prst="rect">
+            <a:avLst/>
+          </a:prstGeom>
+          <a:noFill/>
+        </p:spPr>
+        <p:txBody>
+          <a:bodyPr wrap="square">
+            <a:spAutoFit/>
+          </a:bodyPr>
+          <a:lstStyle/>
+          <a:p>
+            <a:pPr algn="ctr"/>
+            <a:r>
+              <a:rPr sz="2000" b="0" i="0">
+                <a:solidFill>
+                  <a:srgbClr val="828282"/>
+                </a:solidFill>
+                <a:latin typeface="Arial"/>
+              </a:rPr>
+              <a:t>あなたは暗闇の光です</a:t>
+            </a:r>
+          </a:p>
+        </p:txBody>
+      </p:sp>
+      <p:sp>
+        <p:nvSpPr>
+          <p:cNvPr id="5" name="TextBox 4"/>
+          <p:cNvSpPr txBox="1"/>
+          <p:nvPr/>
+        </p:nvSpPr>
+        <p:spPr>
+          <a:xfrm>
+            <a:off x="640080" y="4494276"/>
+            <a:ext cx="10911535" cy="310896"/>
+          </a:xfrm>
+          <a:prstGeom prst="rect">
+            <a:avLst/>
+          </a:prstGeom>
+          <a:noFill/>
+        </p:spPr>
+        <p:txBody>
+          <a:bodyPr wrap="square">
+            <a:spAutoFit/>
+          </a:bodyPr>
+          <a:lstStyle/>
+          <a:p>
+            <a:pPr algn="ctr"/>
+            <a:r>
+              <a:rPr sz="2000" b="0" i="0">
+                <a:solidFill>
+                  <a:srgbClr val="828282"/>
+                </a:solidFill>
+                <a:latin typeface="Arial"/>
+              </a:rPr>
+              <a:t>あなたは絶望した者たちの希望です</a:t>
+            </a:r>
+          </a:p>
+        </p:txBody>
+      </p:sp>
     </p:spTree>
   </p:cSld>
   <p:clrMapOvr>
@@ -9133,6 +12528,76 @@
           </a:p>
         </p:txBody>
       </p:sp>
+      <p:sp>
+        <p:nvSpPr>
+          <p:cNvPr id="4" name="TextBox 3"/>
+          <p:cNvSpPr txBox="1"/>
+          <p:nvPr/>
+        </p:nvSpPr>
+        <p:spPr>
+          <a:xfrm>
+            <a:off x="640080" y="4128516"/>
+            <a:ext cx="10911535" cy="310896"/>
+          </a:xfrm>
+          <a:prstGeom prst="rect">
+            <a:avLst/>
+          </a:prstGeom>
+          <a:noFill/>
+        </p:spPr>
+        <p:txBody>
+          <a:bodyPr wrap="square">
+            <a:spAutoFit/>
+          </a:bodyPr>
+          <a:lstStyle/>
+          <a:p>
+            <a:pPr algn="ctr"/>
+            <a:r>
+              <a:rPr sz="2000" b="0" i="0">
+                <a:solidFill>
+                  <a:srgbClr val="828282"/>
+                </a:solidFill>
+                <a:latin typeface="Arial"/>
+              </a:rPr>
+              <a:t>そして大いなる事柄がまだこの都市で成し遂げられるでしょう</a:t>
+            </a:r>
+          </a:p>
+        </p:txBody>
+      </p:sp>
+      <p:sp>
+        <p:nvSpPr>
+          <p:cNvPr id="5" name="TextBox 4"/>
+          <p:cNvSpPr txBox="1"/>
+          <p:nvPr/>
+        </p:nvSpPr>
+        <p:spPr>
+          <a:xfrm>
+            <a:off x="640080" y="4494276"/>
+            <a:ext cx="10911535" cy="310896"/>
+          </a:xfrm>
+          <a:prstGeom prst="rect">
+            <a:avLst/>
+          </a:prstGeom>
+          <a:noFill/>
+        </p:spPr>
+        <p:txBody>
+          <a:bodyPr wrap="square">
+            <a:spAutoFit/>
+          </a:bodyPr>
+          <a:lstStyle/>
+          <a:p>
+            <a:pPr algn="ctr"/>
+            <a:r>
+              <a:rPr sz="2000" b="0" i="0">
+                <a:solidFill>
+                  <a:srgbClr val="828282"/>
+                </a:solidFill>
+                <a:latin typeface="Arial"/>
+              </a:rPr>
+              <a:t>この都市で</a:t>
+            </a:r>
+          </a:p>
+        </p:txBody>
+      </p:sp>
     </p:spTree>
   </p:cSld>
   <p:clrMapOvr>
@@ -9229,6 +12694,76 @@
           </a:p>
         </p:txBody>
       </p:sp>
+      <p:sp>
+        <p:nvSpPr>
+          <p:cNvPr id="4" name="TextBox 3"/>
+          <p:cNvSpPr txBox="1"/>
+          <p:nvPr/>
+        </p:nvSpPr>
+        <p:spPr>
+          <a:xfrm>
+            <a:off x="640080" y="4128516"/>
+            <a:ext cx="10911535" cy="310896"/>
+          </a:xfrm>
+          <a:prstGeom prst="rect">
+            <a:avLst/>
+          </a:prstGeom>
+          <a:noFill/>
+        </p:spPr>
+        <p:txBody>
+          <a:bodyPr wrap="square">
+            <a:spAutoFit/>
+          </a:bodyPr>
+          <a:lstStyle/>
+          <a:p>
+            <a:pPr algn="ctr"/>
+            <a:r>
+              <a:rPr sz="2000" b="0" i="0">
+                <a:solidFill>
+                  <a:srgbClr val="828282"/>
+                </a:solidFill>
+                <a:latin typeface="Arial"/>
+              </a:rPr>
+              <a:t>あなたはこの都市の神です</a:t>
+            </a:r>
+          </a:p>
+        </p:txBody>
+      </p:sp>
+      <p:sp>
+        <p:nvSpPr>
+          <p:cNvPr id="5" name="TextBox 4"/>
+          <p:cNvSpPr txBox="1"/>
+          <p:nvPr/>
+        </p:nvSpPr>
+        <p:spPr>
+          <a:xfrm>
+            <a:off x="640080" y="4494276"/>
+            <a:ext cx="10911535" cy="310896"/>
+          </a:xfrm>
+          <a:prstGeom prst="rect">
+            <a:avLst/>
+          </a:prstGeom>
+          <a:noFill/>
+        </p:spPr>
+        <p:txBody>
+          <a:bodyPr wrap="square">
+            <a:spAutoFit/>
+          </a:bodyPr>
+          <a:lstStyle/>
+          <a:p>
+            <a:pPr algn="ctr"/>
+            <a:r>
+              <a:rPr sz="2000" b="0" i="0">
+                <a:solidFill>
+                  <a:srgbClr val="828282"/>
+                </a:solidFill>
+                <a:latin typeface="Arial"/>
+              </a:rPr>
+              <a:t>あなたはこの民の王です</a:t>
+            </a:r>
+          </a:p>
+        </p:txBody>
+      </p:sp>
     </p:spTree>
   </p:cSld>
   <p:clrMapOvr>
@@ -9325,6 +12860,76 @@
           </a:p>
         </p:txBody>
       </p:sp>
+      <p:sp>
+        <p:nvSpPr>
+          <p:cNvPr id="4" name="TextBox 3"/>
+          <p:cNvSpPr txBox="1"/>
+          <p:nvPr/>
+        </p:nvSpPr>
+        <p:spPr>
+          <a:xfrm>
+            <a:off x="640080" y="4128516"/>
+            <a:ext cx="10911535" cy="310896"/>
+          </a:xfrm>
+          <a:prstGeom prst="rect">
+            <a:avLst/>
+          </a:prstGeom>
+          <a:noFill/>
+        </p:spPr>
+        <p:txBody>
+          <a:bodyPr wrap="square">
+            <a:spAutoFit/>
+          </a:bodyPr>
+          <a:lstStyle/>
+          <a:p>
+            <a:pPr algn="ctr"/>
+            <a:r>
+              <a:rPr sz="2000" b="0" i="0">
+                <a:solidFill>
+                  <a:srgbClr val="828282"/>
+                </a:solidFill>
+                <a:latin typeface="Arial"/>
+              </a:rPr>
+              <a:t>あなたは不安な者たちの平和です</a:t>
+            </a:r>
+          </a:p>
+        </p:txBody>
+      </p:sp>
+      <p:sp>
+        <p:nvSpPr>
+          <p:cNvPr id="5" name="TextBox 4"/>
+          <p:cNvSpPr txBox="1"/>
+          <p:nvPr/>
+        </p:nvSpPr>
+        <p:spPr>
+          <a:xfrm>
+            <a:off x="640080" y="4494276"/>
+            <a:ext cx="10911535" cy="310896"/>
+          </a:xfrm>
+          <a:prstGeom prst="rect">
+            <a:avLst/>
+          </a:prstGeom>
+          <a:noFill/>
+        </p:spPr>
+        <p:txBody>
+          <a:bodyPr wrap="square">
+            <a:spAutoFit/>
+          </a:bodyPr>
+          <a:lstStyle/>
+          <a:p>
+            <a:pPr algn="ctr"/>
+            <a:r>
+              <a:rPr sz="2000" b="0" i="0">
+                <a:solidFill>
+                  <a:srgbClr val="828282"/>
+                </a:solidFill>
+                <a:latin typeface="Arial"/>
+              </a:rPr>
+              <a:t>あなたです</a:t>
+            </a:r>
+          </a:p>
+        </p:txBody>
+      </p:sp>
     </p:spTree>
   </p:cSld>
   <p:clrMapOvr>
@@ -9421,6 +13026,76 @@
           </a:p>
         </p:txBody>
       </p:sp>
+      <p:sp>
+        <p:nvSpPr>
+          <p:cNvPr id="4" name="TextBox 3"/>
+          <p:cNvSpPr txBox="1"/>
+          <p:nvPr/>
+        </p:nvSpPr>
+        <p:spPr>
+          <a:xfrm>
+            <a:off x="640080" y="4128516"/>
+            <a:ext cx="10911535" cy="310896"/>
+          </a:xfrm>
+          <a:prstGeom prst="rect">
+            <a:avLst/>
+          </a:prstGeom>
+          <a:noFill/>
+        </p:spPr>
+        <p:txBody>
+          <a:bodyPr wrap="square">
+            <a:spAutoFit/>
+          </a:bodyPr>
+          <a:lstStyle/>
+          <a:p>
+            <a:pPr algn="ctr"/>
+            <a:r>
+              <a:rPr sz="2000" b="0" i="0">
+                <a:solidFill>
+                  <a:srgbClr val="828282"/>
+                </a:solidFill>
+                <a:latin typeface="Arial"/>
+              </a:rPr>
+              <a:t>私たちの神のようなお方はいません</a:t>
+            </a:r>
+          </a:p>
+        </p:txBody>
+      </p:sp>
+      <p:sp>
+        <p:nvSpPr>
+          <p:cNvPr id="5" name="TextBox 4"/>
+          <p:cNvSpPr txBox="1"/>
+          <p:nvPr/>
+        </p:nvSpPr>
+        <p:spPr>
+          <a:xfrm>
+            <a:off x="640080" y="4494276"/>
+            <a:ext cx="10911535" cy="310896"/>
+          </a:xfrm>
+          <a:prstGeom prst="rect">
+            <a:avLst/>
+          </a:prstGeom>
+          <a:noFill/>
+        </p:spPr>
+        <p:txBody>
+          <a:bodyPr wrap="square">
+            <a:spAutoFit/>
+          </a:bodyPr>
+          <a:lstStyle/>
+          <a:p>
+            <a:pPr algn="ctr"/>
+            <a:r>
+              <a:rPr sz="2000" b="0" i="0">
+                <a:solidFill>
+                  <a:srgbClr val="828282"/>
+                </a:solidFill>
+                <a:latin typeface="Arial"/>
+              </a:rPr>
+              <a:t>私たちの神のようなお方はいません</a:t>
+            </a:r>
+          </a:p>
+        </p:txBody>
+      </p:sp>
     </p:spTree>
   </p:cSld>
   <p:clrMapOvr>
@@ -9517,6 +13192,76 @@
           </a:p>
         </p:txBody>
       </p:sp>
+      <p:sp>
+        <p:nvSpPr>
+          <p:cNvPr id="4" name="TextBox 3"/>
+          <p:cNvSpPr txBox="1"/>
+          <p:nvPr/>
+        </p:nvSpPr>
+        <p:spPr>
+          <a:xfrm>
+            <a:off x="640080" y="4128516"/>
+            <a:ext cx="10911535" cy="310896"/>
+          </a:xfrm>
+          <a:prstGeom prst="rect">
+            <a:avLst/>
+          </a:prstGeom>
+          <a:noFill/>
+        </p:spPr>
+        <p:txBody>
+          <a:bodyPr wrap="square">
+            <a:spAutoFit/>
+          </a:bodyPr>
+          <a:lstStyle/>
+          <a:p>
+            <a:pPr algn="ctr"/>
+            <a:r>
+              <a:rPr sz="2000" b="0" i="0">
+                <a:solidFill>
+                  <a:srgbClr val="828282"/>
+                </a:solidFill>
+                <a:latin typeface="Arial"/>
+              </a:rPr>
+              <a:t>さらに大いなる事柄がまだ来ようとしています</a:t>
+            </a:r>
+          </a:p>
+        </p:txBody>
+      </p:sp>
+      <p:sp>
+        <p:nvSpPr>
+          <p:cNvPr id="5" name="TextBox 4"/>
+          <p:cNvSpPr txBox="1"/>
+          <p:nvPr/>
+        </p:nvSpPr>
+        <p:spPr>
+          <a:xfrm>
+            <a:off x="640080" y="4494276"/>
+            <a:ext cx="10911535" cy="310896"/>
+          </a:xfrm>
+          <a:prstGeom prst="rect">
+            <a:avLst/>
+          </a:prstGeom>
+          <a:noFill/>
+        </p:spPr>
+        <p:txBody>
+          <a:bodyPr wrap="square">
+            <a:spAutoFit/>
+          </a:bodyPr>
+          <a:lstStyle/>
+          <a:p>
+            <a:pPr algn="ctr"/>
+            <a:r>
+              <a:rPr sz="2000" b="0" i="0">
+                <a:solidFill>
+                  <a:srgbClr val="828282"/>
+                </a:solidFill>
+                <a:latin typeface="Arial"/>
+              </a:rPr>
+              <a:t>そして大いなる事柄がまだこの都市で成し遂げられるでしょう</a:t>
+            </a:r>
+          </a:p>
+        </p:txBody>
+      </p:sp>
     </p:spTree>
   </p:cSld>
   <p:clrMapOvr>
@@ -9613,6 +13358,76 @@
           </a:p>
         </p:txBody>
       </p:sp>
+      <p:sp>
+        <p:nvSpPr>
+          <p:cNvPr id="4" name="TextBox 3"/>
+          <p:cNvSpPr txBox="1"/>
+          <p:nvPr/>
+        </p:nvSpPr>
+        <p:spPr>
+          <a:xfrm>
+            <a:off x="640080" y="4128516"/>
+            <a:ext cx="10911535" cy="310896"/>
+          </a:xfrm>
+          <a:prstGeom prst="rect">
+            <a:avLst/>
+          </a:prstGeom>
+          <a:noFill/>
+        </p:spPr>
+        <p:txBody>
+          <a:bodyPr wrap="square">
+            <a:spAutoFit/>
+          </a:bodyPr>
+          <a:lstStyle/>
+          <a:p>
+            <a:pPr algn="ctr"/>
+            <a:r>
+              <a:rPr sz="2000" b="0" i="0">
+                <a:solidFill>
+                  <a:srgbClr val="828282"/>
+                </a:solidFill>
+                <a:latin typeface="Arial"/>
+              </a:rPr>
+              <a:t>この都市で</a:t>
+            </a:r>
+          </a:p>
+        </p:txBody>
+      </p:sp>
+      <p:sp>
+        <p:nvSpPr>
+          <p:cNvPr id="5" name="TextBox 4"/>
+          <p:cNvSpPr txBox="1"/>
+          <p:nvPr/>
+        </p:nvSpPr>
+        <p:spPr>
+          <a:xfrm>
+            <a:off x="640080" y="4494276"/>
+            <a:ext cx="10911535" cy="310896"/>
+          </a:xfrm>
+          <a:prstGeom prst="rect">
+            <a:avLst/>
+          </a:prstGeom>
+          <a:noFill/>
+        </p:spPr>
+        <p:txBody>
+          <a:bodyPr wrap="square">
+            <a:spAutoFit/>
+          </a:bodyPr>
+          <a:lstStyle/>
+          <a:p>
+            <a:pPr algn="ctr"/>
+            <a:r>
+              <a:rPr sz="2000" b="0" i="0">
+                <a:solidFill>
+                  <a:srgbClr val="828282"/>
+                </a:solidFill>
+                <a:latin typeface="Arial"/>
+              </a:rPr>
+              <a:t>私たちは信じます！</a:t>
+            </a:r>
+          </a:p>
+        </p:txBody>
+      </p:sp>
     </p:spTree>
   </p:cSld>
   <p:clrMapOvr>
@@ -9709,6 +13524,76 @@
           </a:p>
         </p:txBody>
       </p:sp>
+      <p:sp>
+        <p:nvSpPr>
+          <p:cNvPr id="4" name="TextBox 3"/>
+          <p:cNvSpPr txBox="1"/>
+          <p:nvPr/>
+        </p:nvSpPr>
+        <p:spPr>
+          <a:xfrm>
+            <a:off x="640080" y="4128516"/>
+            <a:ext cx="10911535" cy="310896"/>
+          </a:xfrm>
+          <a:prstGeom prst="rect">
+            <a:avLst/>
+          </a:prstGeom>
+          <a:noFill/>
+        </p:spPr>
+        <p:txBody>
+          <a:bodyPr wrap="square">
+            <a:spAutoFit/>
+          </a:bodyPr>
+          <a:lstStyle/>
+          <a:p>
+            <a:pPr algn="ctr"/>
+            <a:r>
+              <a:rPr sz="2000" b="0" i="0">
+                <a:solidFill>
+                  <a:srgbClr val="828282"/>
+                </a:solidFill>
+                <a:latin typeface="Arial"/>
+              </a:rPr>
+              <a:t>私たちはあなたを信じます、神よ</a:t>
+            </a:r>
+          </a:p>
+        </p:txBody>
+      </p:sp>
+      <p:sp>
+        <p:nvSpPr>
+          <p:cNvPr id="5" name="TextBox 4"/>
+          <p:cNvSpPr txBox="1"/>
+          <p:nvPr/>
+        </p:nvSpPr>
+        <p:spPr>
+          <a:xfrm>
+            <a:off x="640080" y="4494276"/>
+            <a:ext cx="10911535" cy="310896"/>
+          </a:xfrm>
+          <a:prstGeom prst="rect">
+            <a:avLst/>
+          </a:prstGeom>
+          <a:noFill/>
+        </p:spPr>
+        <p:txBody>
+          <a:bodyPr wrap="square">
+            <a:spAutoFit/>
+          </a:bodyPr>
+          <a:lstStyle/>
+          <a:p>
+            <a:pPr algn="ctr"/>
+            <a:r>
+              <a:rPr sz="2000" b="0" i="0">
+                <a:solidFill>
+                  <a:srgbClr val="828282"/>
+                </a:solidFill>
+                <a:latin typeface="Arial"/>
+              </a:rPr>
+              <a:t>さらに大いなる事柄がまだ来ようとしています</a:t>
+            </a:r>
+          </a:p>
+        </p:txBody>
+      </p:sp>
     </p:spTree>
   </p:cSld>
   <p:clrMapOvr>
@@ -9770,6 +13655,41 @@
           </a:p>
         </p:txBody>
       </p:sp>
+      <p:sp>
+        <p:nvSpPr>
+          <p:cNvPr id="3" name="TextBox 2"/>
+          <p:cNvSpPr txBox="1"/>
+          <p:nvPr/>
+        </p:nvSpPr>
+        <p:spPr>
+          <a:xfrm>
+            <a:off x="640080" y="3845052"/>
+            <a:ext cx="10911535" cy="310896"/>
+          </a:xfrm>
+          <a:prstGeom prst="rect">
+            <a:avLst/>
+          </a:prstGeom>
+          <a:noFill/>
+        </p:spPr>
+        <p:txBody>
+          <a:bodyPr wrap="square">
+            <a:spAutoFit/>
+          </a:bodyPr>
+          <a:lstStyle/>
+          <a:p>
+            <a:pPr algn="ctr"/>
+            <a:r>
+              <a:rPr sz="2000" b="0" i="0">
+                <a:solidFill>
+                  <a:srgbClr val="828282"/>
+                </a:solidFill>
+                <a:latin typeface="Arial"/>
+              </a:rPr>
+              <a:t>そして大いなる事柄がまだこの都市で成し遂げられるでしょう</a:t>
+            </a:r>
+          </a:p>
+        </p:txBody>
+      </p:sp>
     </p:spTree>
   </p:cSld>
   <p:clrMapOvr>
@@ -9866,6 +13786,76 @@
           </a:p>
         </p:txBody>
       </p:sp>
+      <p:sp>
+        <p:nvSpPr>
+          <p:cNvPr id="4" name="TextBox 3"/>
+          <p:cNvSpPr txBox="1"/>
+          <p:nvPr/>
+        </p:nvSpPr>
+        <p:spPr>
+          <a:xfrm>
+            <a:off x="640080" y="4128516"/>
+            <a:ext cx="10911535" cy="310896"/>
+          </a:xfrm>
+          <a:prstGeom prst="rect">
+            <a:avLst/>
+          </a:prstGeom>
+          <a:noFill/>
+        </p:spPr>
+        <p:txBody>
+          <a:bodyPr wrap="square">
+            <a:spAutoFit/>
+          </a:bodyPr>
+          <a:lstStyle/>
+          <a:p>
+            <a:pPr algn="ctr"/>
+            <a:r>
+              <a:rPr sz="2000" b="0" i="0">
+                <a:solidFill>
+                  <a:srgbClr val="828282"/>
+                </a:solidFill>
+                <a:latin typeface="Arial"/>
+              </a:rPr>
+              <a:t>私たちの神のようなお方はいません</a:t>
+            </a:r>
+          </a:p>
+        </p:txBody>
+      </p:sp>
+      <p:sp>
+        <p:nvSpPr>
+          <p:cNvPr id="5" name="TextBox 4"/>
+          <p:cNvSpPr txBox="1"/>
+          <p:nvPr/>
+        </p:nvSpPr>
+        <p:spPr>
+          <a:xfrm>
+            <a:off x="640080" y="4494276"/>
+            <a:ext cx="10911535" cy="310896"/>
+          </a:xfrm>
+          <a:prstGeom prst="rect">
+            <a:avLst/>
+          </a:prstGeom>
+          <a:noFill/>
+        </p:spPr>
+        <p:txBody>
+          <a:bodyPr wrap="square">
+            <a:spAutoFit/>
+          </a:bodyPr>
+          <a:lstStyle/>
+          <a:p>
+            <a:pPr algn="ctr"/>
+            <a:r>
+              <a:rPr sz="2000" b="0" i="0">
+                <a:solidFill>
+                  <a:srgbClr val="828282"/>
+                </a:solidFill>
+                <a:latin typeface="Arial"/>
+              </a:rPr>
+              <a:t>さらに大いなる事柄がまだ来ようとしています</a:t>
+            </a:r>
+          </a:p>
+        </p:txBody>
+      </p:sp>
     </p:spTree>
   </p:cSld>
   <p:clrMapOvr>
@@ -9962,6 +13952,76 @@
           </a:p>
         </p:txBody>
       </p:sp>
+      <p:sp>
+        <p:nvSpPr>
+          <p:cNvPr id="4" name="TextBox 3"/>
+          <p:cNvSpPr txBox="1"/>
+          <p:nvPr/>
+        </p:nvSpPr>
+        <p:spPr>
+          <a:xfrm>
+            <a:off x="640080" y="4128516"/>
+            <a:ext cx="10911535" cy="310896"/>
+          </a:xfrm>
+          <a:prstGeom prst="rect">
+            <a:avLst/>
+          </a:prstGeom>
+          <a:noFill/>
+        </p:spPr>
+        <p:txBody>
+          <a:bodyPr wrap="square">
+            <a:spAutoFit/>
+          </a:bodyPr>
+          <a:lstStyle/>
+          <a:p>
+            <a:pPr algn="ctr"/>
+            <a:r>
+              <a:rPr sz="2000" b="0" i="0">
+                <a:solidFill>
+                  <a:srgbClr val="828282"/>
+                </a:solidFill>
+                <a:latin typeface="Arial"/>
+              </a:rPr>
+              <a:t>そして大いなる事柄がまだこの都市で成し遂げられるでしょう</a:t>
+            </a:r>
+          </a:p>
+        </p:txBody>
+      </p:sp>
+      <p:sp>
+        <p:nvSpPr>
+          <p:cNvPr id="5" name="TextBox 4"/>
+          <p:cNvSpPr txBox="1"/>
+          <p:nvPr/>
+        </p:nvSpPr>
+        <p:spPr>
+          <a:xfrm>
+            <a:off x="640080" y="4494276"/>
+            <a:ext cx="10911535" cy="310896"/>
+          </a:xfrm>
+          <a:prstGeom prst="rect">
+            <a:avLst/>
+          </a:prstGeom>
+          <a:noFill/>
+        </p:spPr>
+        <p:txBody>
+          <a:bodyPr wrap="square">
+            <a:spAutoFit/>
+          </a:bodyPr>
+          <a:lstStyle/>
+          <a:p>
+            <a:pPr algn="ctr"/>
+            <a:r>
+              <a:rPr sz="2000" b="0" i="0">
+                <a:solidFill>
+                  <a:srgbClr val="828282"/>
+                </a:solidFill>
+                <a:latin typeface="Arial"/>
+              </a:rPr>
+              <a:t>この都市で</a:t>
+            </a:r>
+          </a:p>
+        </p:txBody>
+      </p:sp>
     </p:spTree>
   </p:cSld>
   <p:clrMapOvr>
@@ -10054,6 +14114,76 @@
                 <a:latin typeface="Arial"/>
               </a:rPr>
               <a:t>Tu és o Rei destas pessoas</a:t>
+            </a:r>
+          </a:p>
+        </p:txBody>
+      </p:sp>
+      <p:sp>
+        <p:nvSpPr>
+          <p:cNvPr id="4" name="TextBox 3"/>
+          <p:cNvSpPr txBox="1"/>
+          <p:nvPr/>
+        </p:nvSpPr>
+        <p:spPr>
+          <a:xfrm>
+            <a:off x="640080" y="4128516"/>
+            <a:ext cx="10911535" cy="310896"/>
+          </a:xfrm>
+          <a:prstGeom prst="rect">
+            <a:avLst/>
+          </a:prstGeom>
+          <a:noFill/>
+        </p:spPr>
+        <p:txBody>
+          <a:bodyPr wrap="square">
+            <a:spAutoFit/>
+          </a:bodyPr>
+          <a:lstStyle/>
+          <a:p>
+            <a:pPr algn="ctr"/>
+            <a:r>
+              <a:rPr sz="2000" b="0" i="0">
+                <a:solidFill>
+                  <a:srgbClr val="828282"/>
+                </a:solidFill>
+                <a:latin typeface="Arial"/>
+              </a:rPr>
+              <a:t>あなたはこの都市の神です</a:t>
+            </a:r>
+          </a:p>
+        </p:txBody>
+      </p:sp>
+      <p:sp>
+        <p:nvSpPr>
+          <p:cNvPr id="5" name="TextBox 4"/>
+          <p:cNvSpPr txBox="1"/>
+          <p:nvPr/>
+        </p:nvSpPr>
+        <p:spPr>
+          <a:xfrm>
+            <a:off x="640080" y="4494276"/>
+            <a:ext cx="10911535" cy="310896"/>
+          </a:xfrm>
+          <a:prstGeom prst="rect">
+            <a:avLst/>
+          </a:prstGeom>
+          <a:noFill/>
+        </p:spPr>
+        <p:txBody>
+          <a:bodyPr wrap="square">
+            <a:spAutoFit/>
+          </a:bodyPr>
+          <a:lstStyle/>
+          <a:p>
+            <a:pPr algn="ctr"/>
+            <a:r>
+              <a:rPr sz="2000" b="0" i="0">
+                <a:solidFill>
+                  <a:srgbClr val="828282"/>
+                </a:solidFill>
+                <a:latin typeface="Arial"/>
+              </a:rPr>
+              <a:t>あなたはこの民の王です</a:t>
             </a:r>
           </a:p>
         </p:txBody>
